--- a/modulo-04/04.05 - Considerações Especiais para SAP S_4HANA Cloud Private Edition e On-Premise/04.05_Clean_Core_no_Private_Edition_e_on-premise.pptx
+++ b/modulo-04/04.05 - Considerações Especiais para SAP S_4HANA Cloud Private Edition e On-Premise/04.05_Clean_Core_no_Private_Edition_e_on-premise.pptx
@@ -20,9 +20,10 @@
     <p:sldId id="268" r:id="rId14"/>
     <p:sldId id="269" r:id="rId15"/>
     <p:sldId id="270" r:id="rId16"/>
+    <p:sldId id="271" r:id="rId17"/>
   </p:sldIdLst>
   <p:notesMasterIdLst>
-    <p:notesMasterId r:id="rId17"/>
+    <p:notesMasterId r:id="rId18"/>
   </p:notesMasterIdLst>
   <p:sldSz cx="12192000" cy="6858000"/>
   <p:notesSz cx="6858000" cy="12192000"/>
@@ -1086,6 +1087,94 @@
 </p:notes>
 </file>
 
+<file path=ppt/notesSlides/notesSlide16.xml><?xml version="1.0" encoding="utf-8"?>
+<p:notes xmlns:a="http://schemas.openxmlformats.org/drawingml/2006/main" xmlns:r="http://schemas.openxmlformats.org/officeDocument/2006/relationships" xmlns:p="http://schemas.openxmlformats.org/presentationml/2006/main">
+  <p:cSld>
+    <p:spTree>
+      <p:nvGrpSpPr>
+        <p:cNvPr id="1" name=""/>
+        <p:cNvGrpSpPr/>
+        <p:nvPr/>
+      </p:nvGrpSpPr>
+      <p:grpSpPr>
+        <a:xfrm>
+          <a:off x="0" y="0"/>
+          <a:ext cx="0" cy="0"/>
+          <a:chOff x="0" y="0"/>
+          <a:chExt cx="0" cy="0"/>
+        </a:xfrm>
+      </p:grpSpPr>
+      <p:sp>
+        <p:nvSpPr>
+          <p:cNvPr id="2" name="Slide Image Placeholder 1"/>
+          <p:cNvSpPr>
+            <a:spLocks noGrp="1" noRot="1" noChangeAspect="1"/>
+          </p:cNvSpPr>
+          <p:nvPr>
+            <p:ph type="sldImg"/>
+          </p:nvPr>
+        </p:nvSpPr>
+        <p:spPr/>
+      </p:sp>
+      <p:sp>
+        <p:nvSpPr>
+          <p:cNvPr id="3" name="Notes Placeholder 2"/>
+          <p:cNvSpPr>
+            <a:spLocks noGrp="1"/>
+          </p:cNvSpPr>
+          <p:nvPr>
+            <p:ph type="body" idx="1"/>
+          </p:nvPr>
+        </p:nvSpPr>
+        <p:spPr/>
+        <p:txBody>
+          <a:bodyPr/>
+          <a:lstStyle/>
+          <a:p>
+            <a:r>
+              <a:rPr lang="en-US" dirty="0"/>
+              <a:t/>
+            </a:r>
+            <a:endParaRPr lang="en-US" dirty="0"/>
+          </a:p>
+        </p:txBody>
+      </p:sp>
+      <p:sp>
+        <p:nvSpPr>
+          <p:cNvPr id="4" name="Slide Number Placeholder 3"/>
+          <p:cNvSpPr>
+            <a:spLocks noGrp="1"/>
+          </p:cNvSpPr>
+          <p:nvPr>
+            <p:ph type="sldNum" sz="quarter" idx="10"/>
+          </p:nvPr>
+        </p:nvSpPr>
+        <p:spPr/>
+        <p:txBody>
+          <a:bodyPr/>
+          <a:lstStyle/>
+          <a:p>
+            <a:fld id="{F7021451-1387-4CA6-816F-3879F97B5CBC}" type="slidenum">
+              <a:rPr lang="en-US"/>
+              <a:t>16</a:t>
+            </a:fld>
+            <a:endParaRPr lang="en-US"/>
+          </a:p>
+        </p:txBody>
+      </p:sp>
+    </p:spTree>
+    <p:extLst>
+      <p:ext uri="{BB962C8B-B14F-4D97-AF65-F5344CB8AC3E}">
+        <p14:creationId xmlns:p14="http://schemas.microsoft.com/office/powerpoint/2010/main" val="1024086991"/>
+      </p:ext>
+    </p:extLst>
+  </p:cSld>
+  <p:clrMapOvr>
+    <a:masterClrMapping/>
+  </p:clrMapOvr>
+</p:notes>
+</file>
+
 <file path=ppt/notesSlides/notesSlide2.xml><?xml version="1.0" encoding="utf-8"?>
 <p:notes xmlns:a="http://schemas.openxmlformats.org/drawingml/2006/main" xmlns:r="http://schemas.openxmlformats.org/officeDocument/2006/relationships" xmlns:p="http://schemas.openxmlformats.org/presentationml/2006/main">
   <p:cSld>
@@ -1906,7 +1995,7 @@
                   <a:srgbClr val="8FA3C7"/>
                 </a:solidFill>
               </a:rPr>
-              <a:t>ABAP Moderno · Módulo 05 — Extensibilidade Clean Core  ·  Aula 5 de 5 — Private Edition e On-Premise</a:t>
+              <a:t>ABAP Moderno · Módulo 04 — Extensibilidade Clean Core  ·  Aula 5 de 5 — Private Edition e On-Premise</a:t>
             </a:r>
             <a:endParaRPr lang="en-US" sz="900" dirty="0"/>
           </a:p>
@@ -2052,7 +2141,7 @@
                   <a:srgbClr val="556B82"/>
                 </a:solidFill>
               </a:rPr>
-              <a:t>ABAP Moderno · Módulo 05 — Extensibilidade Clean Core  ·  Aula 5 de 5 — Private Edition e On-Premise</a:t>
+              <a:t>ABAP Moderno · Módulo 04 — Extensibilidade Clean Core  ·  Aula 5 de 5 — Private Edition e On-Premise</a:t>
             </a:r>
             <a:endParaRPr lang="en-US" sz="900" dirty="0"/>
           </a:p>
@@ -2483,7 +2572,7 @@
                   <a:srgbClr val="89D1FF"/>
                 </a:solidFill>
               </a:rPr>
-              <a:t>MÓDULO 05 · AULA 05 DE 05</a:t>
+              <a:t>MÓDULO 04 · AULA 05 DE 05</a:t>
             </a:r>
             <a:endParaRPr lang="en-US" sz="1400" dirty="0"/>
           </a:p>
@@ -2781,7 +2870,7 @@
                   <a:srgbClr val="8FA3C7"/>
                 </a:solidFill>
               </a:rPr>
-              <a:t>ABAP Moderno · Módulo 05 — Extensibilidade Clean Core · Design System SAP Horizon</a:t>
+              <a:t>ABAP Moderno · Módulo 04 — Extensibilidade Clean Core · Design System SAP Horizon</a:t>
             </a:r>
             <a:endParaRPr lang="en-US" sz="1100" dirty="0"/>
           </a:p>
@@ -4062,7 +4151,7 @@
         </p:blipFill>
         <p:spPr>
           <a:xfrm>
-            <a:off x="850392" y="2768727"/>
+            <a:off x="4624730" y="2768727"/>
             <a:ext cx="256032" cy="256032"/>
           </a:xfrm>
           <a:prstGeom prst="rect">
@@ -4086,7 +4175,7 @@
         </p:blipFill>
         <p:spPr>
           <a:xfrm>
-            <a:off x="4624730" y="2768727"/>
+            <a:off x="8399069" y="2768727"/>
             <a:ext cx="256032" cy="256032"/>
           </a:xfrm>
           <a:prstGeom prst="rect">
@@ -4110,8 +4199,8 @@
         </p:blipFill>
         <p:spPr>
           <a:xfrm>
-            <a:off x="749808" y="4912233"/>
-            <a:ext cx="310896" cy="310896"/>
+            <a:off x="850392" y="2768727"/>
+            <a:ext cx="256032" cy="256032"/>
           </a:xfrm>
           <a:prstGeom prst="rect">
             <a:avLst/>
@@ -4134,8 +4223,8 @@
         </p:blipFill>
         <p:spPr>
           <a:xfrm>
-            <a:off x="8399069" y="2768727"/>
-            <a:ext cx="256032" cy="256032"/>
+            <a:off x="749808" y="4912233"/>
+            <a:ext cx="310896" cy="310896"/>
           </a:xfrm>
           <a:prstGeom prst="rect">
             <a:avLst/>
@@ -4264,7 +4353,7 @@
                   <a:srgbClr val="89D1FF"/>
                 </a:solidFill>
               </a:rPr>
-              <a:t>AULA 05.05 · SEÇÃO 3</a:t>
+              <a:t>AULA 04.05 · SEÇÃO 3</a:t>
             </a:r>
             <a:endParaRPr lang="en-US" sz="1300" dirty="0"/>
           </a:p>
@@ -7976,7 +8065,7 @@
                   <a:srgbClr val="0064D9"/>
                 </a:solidFill>
               </a:rPr>
-              <a:t>WRAPPERS · BROWNFIELD</a:t>
+              <a:t>WRAPPERS · NO PROJETO</a:t>
             </a:r>
             <a:endParaRPr lang="en-US" sz="1100" dirty="0"/>
           </a:p>
@@ -8014,7 +8103,7 @@
                   <a:srgbClr val="1D2D3E"/>
                 </a:solidFill>
               </a:rPr>
-              <a:t>Quatro workstreams depois da conversão</a:t>
+              <a:t>A mesma consulta de CEP em dois níveis</a:t>
             </a:r>
             <a:endParaRPr lang="en-US" sz="2800" dirty="0"/>
           </a:p>
@@ -8028,33 +8117,137 @@
         </p:nvSpPr>
         <p:spPr>
           <a:xfrm>
-            <a:off x="1860004" y="2656332"/>
-            <a:ext cx="8471687" cy="0"/>
-          </a:xfrm>
-          <a:prstGeom prst="line">
+            <a:off x="548640" y="1645920"/>
+            <a:ext cx="2779776" cy="274320"/>
+          </a:xfrm>
+          <a:prstGeom prst="roundRect">
+            <a:avLst>
+              <a:gd name="adj" fmla="val 50000"/>
+            </a:avLst>
+          </a:prstGeom>
+          <a:solidFill>
+            <a:srgbClr val="F5FAE5"/>
+          </a:solidFill>
+          <a:ln/>
+        </p:spPr>
+      </p:sp>
+      <p:sp>
+        <p:nvSpPr>
+          <p:cNvPr id="5" name="Text 3"/>
+          <p:cNvSpPr txBox="1"/>
+          <p:nvPr/>
+        </p:nvSpPr>
+        <p:spPr>
+          <a:xfrm>
+            <a:off x="548640" y="1645920"/>
+            <a:ext cx="2779776" cy="274320"/>
+          </a:xfrm>
+          <a:prstGeom prst="rect">
             <a:avLst/>
           </a:prstGeom>
           <a:noFill/>
-          <a:ln w="25400">
-            <a:solidFill>
-              <a:srgbClr val="0070F2"/>
-            </a:solidFill>
-            <a:prstDash val="dash"/>
-          </a:ln>
-        </p:spPr>
-      </p:sp>
-      <p:sp>
-        <p:nvSpPr>
-          <p:cNvPr id="5" name="Shape 3"/>
+          <a:ln/>
+        </p:spPr>
+        <p:txBody>
+          <a:bodyPr wrap="square" lIns="0" tIns="0" rIns="0" bIns="0" rtlCol="0" anchor="ctr"/>
+          <a:lstStyle/>
+          <a:p>
+            <a:pPr algn="ctr" indent="0" marL="0">
+              <a:buNone/>
+            </a:pPr>
+            <a:r>
+              <a:rPr lang="en-US" sz="1000" b="1" dirty="0">
+                <a:solidFill>
+                  <a:srgbClr val="256F3A"/>
+                </a:solidFill>
+              </a:rPr>
+              <a:t>SAP BTP · nível A (ABAP Cloud)</a:t>
+            </a:r>
+            <a:endParaRPr lang="en-US" sz="1000" dirty="0"/>
+          </a:p>
+        </p:txBody>
+      </p:sp>
+      <p:sp>
+        <p:nvSpPr>
+          <p:cNvPr id="6" name="Shape 4"/>
           <p:cNvSpPr/>
           <p:nvPr/>
         </p:nvSpPr>
         <p:spPr>
           <a:xfrm>
-            <a:off x="1512532" y="2308860"/>
-            <a:ext cx="694944" cy="694944"/>
-          </a:xfrm>
-          <a:prstGeom prst="ellipse">
+            <a:off x="548640" y="2029968"/>
+            <a:ext cx="5410048" cy="2002536"/>
+          </a:xfrm>
+          <a:prstGeom prst="roundRect">
+            <a:avLst>
+              <a:gd name="adj" fmla="val 3653"/>
+            </a:avLst>
+          </a:prstGeom>
+          <a:solidFill>
+            <a:srgbClr val="1F1F1F"/>
+          </a:solidFill>
+          <a:ln/>
+          <a:effectLst>
+            <a:outerShdw sx="100000" sy="100000" kx="0" ky="0" algn="bl" rotWithShape="0" blurRad="76200" dist="25400" dir="5400000">
+              <a:srgbClr val="000000">
+                <a:alpha val="18000"/>
+              </a:srgbClr>
+            </a:outerShdw>
+          </a:effectLst>
+        </p:spPr>
+      </p:sp>
+      <p:sp>
+        <p:nvSpPr>
+          <p:cNvPr id="7" name="Shape 5"/>
+          <p:cNvSpPr/>
+          <p:nvPr/>
+        </p:nvSpPr>
+        <p:spPr>
+          <a:xfrm>
+            <a:off x="566928" y="2048256"/>
+            <a:ext cx="5373472" cy="329184"/>
+          </a:xfrm>
+          <a:prstGeom prst="rect">
+            <a:avLst/>
+          </a:prstGeom>
+          <a:solidFill>
+            <a:srgbClr val="2B2B2B"/>
+          </a:solidFill>
+          <a:ln/>
+        </p:spPr>
+      </p:sp>
+      <p:sp>
+        <p:nvSpPr>
+          <p:cNvPr id="8" name="Shape 6"/>
+          <p:cNvSpPr/>
+          <p:nvPr/>
+        </p:nvSpPr>
+        <p:spPr>
+          <a:xfrm>
+            <a:off x="640080" y="2084832"/>
+            <a:ext cx="2153412" cy="292608"/>
+          </a:xfrm>
+          <a:prstGeom prst="rect">
+            <a:avLst/>
+          </a:prstGeom>
+          <a:solidFill>
+            <a:srgbClr val="1F1F1F"/>
+          </a:solidFill>
+          <a:ln/>
+        </p:spPr>
+      </p:sp>
+      <p:sp>
+        <p:nvSpPr>
+          <p:cNvPr id="9" name="Shape 7"/>
+          <p:cNvSpPr/>
+          <p:nvPr/>
+        </p:nvSpPr>
+        <p:spPr>
+          <a:xfrm>
+            <a:off x="640080" y="2084832"/>
+            <a:ext cx="2153412" cy="27432"/>
+          </a:xfrm>
+          <a:prstGeom prst="rect">
             <a:avLst/>
           </a:prstGeom>
           <a:solidFill>
@@ -8065,14 +8258,14 @@
       </p:sp>
       <p:sp>
         <p:nvSpPr>
-          <p:cNvPr id="6" name="Text 4"/>
+          <p:cNvPr id="10" name="Text 8"/>
           <p:cNvSpPr txBox="1"/>
           <p:nvPr/>
         </p:nvSpPr>
         <p:spPr>
           <a:xfrm>
-            <a:off x="1512532" y="2308860"/>
-            <a:ext cx="694944" cy="694944"/>
+            <a:off x="731520" y="2103120"/>
+            <a:ext cx="1970532" cy="274320"/>
           </a:xfrm>
           <a:prstGeom prst="rect">
             <a:avLst/>
@@ -8084,50 +8277,915 @@
           <a:bodyPr wrap="square" lIns="0" tIns="0" rIns="0" bIns="0" rtlCol="0" anchor="ctr"/>
           <a:lstStyle/>
           <a:p>
-            <a:pPr algn="ctr" indent="0" marL="0">
-              <a:buNone/>
-            </a:pPr>
-            <a:r>
-              <a:rPr lang="en-US" sz="2280" b="1" dirty="0">
+            <a:pPr indent="0" marL="0">
+              <a:buNone/>
+            </a:pPr>
+            <a:r>
+              <a:rPr lang="en-US" sz="950" dirty="0">
                 <a:solidFill>
                   <a:srgbClr val="FFFFFF"/>
                 </a:solidFill>
               </a:rPr>
+              <a:t>zcl_pc_viacep.clas.abap</a:t>
+            </a:r>
+            <a:endParaRPr lang="en-US" sz="950" dirty="0"/>
+          </a:p>
+        </p:txBody>
+      </p:sp>
+      <p:sp>
+        <p:nvSpPr>
+          <p:cNvPr id="11" name="Text 9"/>
+          <p:cNvSpPr txBox="1"/>
+          <p:nvPr/>
+        </p:nvSpPr>
+        <p:spPr>
+          <a:xfrm>
+            <a:off x="685800" y="2487168"/>
+            <a:ext cx="320040" cy="1453896"/>
+          </a:xfrm>
+          <a:prstGeom prst="rect">
+            <a:avLst/>
+          </a:prstGeom>
+          <a:noFill/>
+          <a:ln/>
+        </p:spPr>
+        <p:txBody>
+          <a:bodyPr wrap="square" lIns="0" tIns="0" rIns="0" bIns="0" rtlCol="0" anchor="t"/>
+          <a:lstStyle/>
+          <a:p>
+            <a:pPr algn="r" indent="0" marL="0">
+              <a:lnSpc>
+                <a:spcPct val="105000"/>
+              </a:lnSpc>
+              <a:buNone/>
+            </a:pPr>
+            <a:r>
+              <a:rPr lang="en-US" sz="1050" dirty="0">
+                <a:solidFill>
+                  <a:srgbClr val="6E7681"/>
+                </a:solidFill>
+                <a:latin typeface="Courier New" pitchFamily="34" charset="0"/>
+                <a:ea typeface="Courier New" pitchFamily="34" charset="-122"/>
+                <a:cs typeface="Courier New" pitchFamily="34" charset="-120"/>
+              </a:rPr>
               <a:t>1</a:t>
             </a:r>
-            <a:endParaRPr lang="en-US" sz="2280" dirty="0"/>
-          </a:p>
-        </p:txBody>
-      </p:sp>
-      <p:sp>
-        <p:nvSpPr>
-          <p:cNvPr id="7" name="Shape 5"/>
+            <a:endParaRPr lang="en-US" sz="1050" dirty="0"/>
+          </a:p>
+          <a:p>
+            <a:pPr algn="r" indent="0" marL="0">
+              <a:lnSpc>
+                <a:spcPct val="105000"/>
+              </a:lnSpc>
+              <a:buNone/>
+            </a:pPr>
+            <a:r>
+              <a:rPr lang="en-US" sz="1050" dirty="0">
+                <a:solidFill>
+                  <a:srgbClr val="6E7681"/>
+                </a:solidFill>
+                <a:latin typeface="Courier New" pitchFamily="34" charset="0"/>
+                <a:ea typeface="Courier New" pitchFamily="34" charset="-122"/>
+                <a:cs typeface="Courier New" pitchFamily="34" charset="-120"/>
+              </a:rPr>
+              <a:t>2</a:t>
+            </a:r>
+            <a:endParaRPr lang="en-US" sz="1050" dirty="0"/>
+          </a:p>
+          <a:p>
+            <a:pPr algn="r" indent="0" marL="0">
+              <a:lnSpc>
+                <a:spcPct val="105000"/>
+              </a:lnSpc>
+              <a:buNone/>
+            </a:pPr>
+            <a:r>
+              <a:rPr lang="en-US" sz="1050" dirty="0">
+                <a:solidFill>
+                  <a:srgbClr val="6E7681"/>
+                </a:solidFill>
+                <a:latin typeface="Courier New" pitchFamily="34" charset="0"/>
+                <a:ea typeface="Courier New" pitchFamily="34" charset="-122"/>
+                <a:cs typeface="Courier New" pitchFamily="34" charset="-120"/>
+              </a:rPr>
+              <a:t>3</a:t>
+            </a:r>
+            <a:endParaRPr lang="en-US" sz="1050" dirty="0"/>
+          </a:p>
+          <a:p>
+            <a:pPr algn="r" indent="0" marL="0">
+              <a:lnSpc>
+                <a:spcPct val="105000"/>
+              </a:lnSpc>
+              <a:buNone/>
+            </a:pPr>
+            <a:r>
+              <a:rPr lang="en-US" sz="1050" dirty="0">
+                <a:solidFill>
+                  <a:srgbClr val="6E7681"/>
+                </a:solidFill>
+                <a:latin typeface="Courier New" pitchFamily="34" charset="0"/>
+                <a:ea typeface="Courier New" pitchFamily="34" charset="-122"/>
+                <a:cs typeface="Courier New" pitchFamily="34" charset="-120"/>
+              </a:rPr>
+              <a:t>4</a:t>
+            </a:r>
+            <a:endParaRPr lang="en-US" sz="1050" dirty="0"/>
+          </a:p>
+          <a:p>
+            <a:pPr algn="r" indent="0" marL="0">
+              <a:lnSpc>
+                <a:spcPct val="105000"/>
+              </a:lnSpc>
+              <a:buNone/>
+            </a:pPr>
+            <a:r>
+              <a:rPr lang="en-US" sz="1050" dirty="0">
+                <a:solidFill>
+                  <a:srgbClr val="6E7681"/>
+                </a:solidFill>
+                <a:latin typeface="Courier New" pitchFamily="34" charset="0"/>
+                <a:ea typeface="Courier New" pitchFamily="34" charset="-122"/>
+                <a:cs typeface="Courier New" pitchFamily="34" charset="-120"/>
+              </a:rPr>
+              <a:t>5</a:t>
+            </a:r>
+            <a:endParaRPr lang="en-US" sz="1050" dirty="0"/>
+          </a:p>
+          <a:p>
+            <a:pPr algn="r" indent="0" marL="0">
+              <a:lnSpc>
+                <a:spcPct val="105000"/>
+              </a:lnSpc>
+              <a:buNone/>
+            </a:pPr>
+            <a:r>
+              <a:rPr lang="en-US" sz="1050" dirty="0">
+                <a:solidFill>
+                  <a:srgbClr val="6E7681"/>
+                </a:solidFill>
+                <a:latin typeface="Courier New" pitchFamily="34" charset="0"/>
+                <a:ea typeface="Courier New" pitchFamily="34" charset="-122"/>
+                <a:cs typeface="Courier New" pitchFamily="34" charset="-120"/>
+              </a:rPr>
+              <a:t>6</a:t>
+            </a:r>
+            <a:endParaRPr lang="en-US" sz="1050" dirty="0"/>
+          </a:p>
+        </p:txBody>
+      </p:sp>
+      <p:sp>
+        <p:nvSpPr>
+          <p:cNvPr id="12" name="Text 10"/>
+          <p:cNvSpPr txBox="1"/>
+          <p:nvPr/>
+        </p:nvSpPr>
+        <p:spPr>
+          <a:xfrm>
+            <a:off x="1051560" y="2487168"/>
+            <a:ext cx="4769968" cy="1453896"/>
+          </a:xfrm>
+          <a:prstGeom prst="rect">
+            <a:avLst/>
+          </a:prstGeom>
+          <a:noFill/>
+          <a:ln/>
+        </p:spPr>
+        <p:txBody>
+          <a:bodyPr wrap="square" lIns="0" tIns="0" rIns="0" bIns="0" rtlCol="0" anchor="t"/>
+          <a:lstStyle/>
+          <a:p>
+            <a:pPr indent="0" marL="0">
+              <a:lnSpc>
+                <a:spcPct val="105000"/>
+              </a:lnSpc>
+              <a:buNone/>
+            </a:pPr>
+            <a:r>
+              <a:rPr lang="en-US" sz="1050" dirty="0">
+                <a:solidFill>
+                  <a:srgbClr val="569CD6"/>
+                </a:solidFill>
+                <a:latin typeface="Courier New" pitchFamily="34" charset="0"/>
+                <a:ea typeface="Courier New" pitchFamily="34" charset="-122"/>
+                <a:cs typeface="Courier New" pitchFamily="34" charset="-120"/>
+              </a:rPr>
+              <a:t>DATA</a:t>
+            </a:r>
+            <a:r>
+              <a:rPr lang="en-US" sz="1050" dirty="0">
+                <a:solidFill>
+                  <a:srgbClr val="CCCCCC"/>
+                </a:solidFill>
+                <a:latin typeface="Courier New" pitchFamily="34" charset="0"/>
+                <a:ea typeface="Courier New" pitchFamily="34" charset="-122"/>
+                <a:cs typeface="Courier New" pitchFamily="34" charset="-120"/>
+              </a:rPr>
+              <a:t>(</a:t>
+            </a:r>
+            <a:r>
+              <a:rPr lang="en-US" sz="1050" dirty="0">
+                <a:solidFill>
+                  <a:srgbClr val="CCCCCC"/>
+                </a:solidFill>
+                <a:latin typeface="Courier New" pitchFamily="34" charset="0"/>
+                <a:ea typeface="Courier New" pitchFamily="34" charset="-122"/>
+                <a:cs typeface="Courier New" pitchFamily="34" charset="-120"/>
+              </a:rPr>
+              <a:t>lo_destino</a:t>
+            </a:r>
+            <a:r>
+              <a:rPr lang="en-US" sz="1050" dirty="0">
+                <a:solidFill>
+                  <a:srgbClr val="CCCCCC"/>
+                </a:solidFill>
+                <a:latin typeface="Courier New" pitchFamily="34" charset="0"/>
+                <a:ea typeface="Courier New" pitchFamily="34" charset="-122"/>
+                <a:cs typeface="Courier New" pitchFamily="34" charset="-120"/>
+              </a:rPr>
+              <a:t>)</a:t>
+            </a:r>
+            <a:r>
+              <a:rPr lang="en-US" sz="1050" dirty="0">
+                <a:solidFill>
+                  <a:srgbClr val="CCCCCC"/>
+                </a:solidFill>
+                <a:latin typeface="Courier New" pitchFamily="34" charset="0"/>
+                <a:ea typeface="Courier New" pitchFamily="34" charset="-122"/>
+                <a:cs typeface="Courier New" pitchFamily="34" charset="-120"/>
+              </a:rPr>
+              <a:t> </a:t>
+            </a:r>
+            <a:r>
+              <a:rPr lang="en-US" sz="1050" dirty="0">
+                <a:solidFill>
+                  <a:srgbClr val="CCCCCC"/>
+                </a:solidFill>
+                <a:latin typeface="Courier New" pitchFamily="34" charset="0"/>
+                <a:ea typeface="Courier New" pitchFamily="34" charset="-122"/>
+                <a:cs typeface="Courier New" pitchFamily="34" charset="-120"/>
+              </a:rPr>
+              <a:t>=</a:t>
+            </a:r>
+            <a:r>
+              <a:rPr lang="en-US" sz="1050" dirty="0">
+                <a:solidFill>
+                  <a:srgbClr val="CCCCCC"/>
+                </a:solidFill>
+                <a:latin typeface="Courier New" pitchFamily="34" charset="0"/>
+                <a:ea typeface="Courier New" pitchFamily="34" charset="-122"/>
+                <a:cs typeface="Courier New" pitchFamily="34" charset="-120"/>
+              </a:rPr>
+              <a:t> </a:t>
+            </a:r>
+            <a:r>
+              <a:rPr lang="en-US" sz="1050" dirty="0">
+                <a:solidFill>
+                  <a:srgbClr val="4EC9B0"/>
+                </a:solidFill>
+                <a:latin typeface="Courier New" pitchFamily="34" charset="0"/>
+                <a:ea typeface="Courier New" pitchFamily="34" charset="-122"/>
+                <a:cs typeface="Courier New" pitchFamily="34" charset="-120"/>
+              </a:rPr>
+              <a:t>cl_http_destination_provider=&gt;</a:t>
+            </a:r>
+            <a:r>
+              <a:rPr lang="en-US" sz="1050" dirty="0">
+                <a:solidFill>
+                  <a:srgbClr val="CCCCCC"/>
+                </a:solidFill>
+                <a:latin typeface="Courier New" pitchFamily="34" charset="0"/>
+                <a:ea typeface="Courier New" pitchFamily="34" charset="-122"/>
+                <a:cs typeface="Courier New" pitchFamily="34" charset="-120"/>
+              </a:rPr>
+              <a:t>create_by_url</a:t>
+            </a:r>
+            <a:r>
+              <a:rPr lang="en-US" sz="1050" dirty="0">
+                <a:solidFill>
+                  <a:srgbClr val="CCCCCC"/>
+                </a:solidFill>
+                <a:latin typeface="Courier New" pitchFamily="34" charset="0"/>
+                <a:ea typeface="Courier New" pitchFamily="34" charset="-122"/>
+                <a:cs typeface="Courier New" pitchFamily="34" charset="-120"/>
+              </a:rPr>
+              <a:t>(</a:t>
+            </a:r>
+            <a:endParaRPr lang="en-US" sz="1050" dirty="0"/>
+          </a:p>
+          <a:p>
+            <a:pPr indent="0" marL="0">
+              <a:lnSpc>
+                <a:spcPct val="105000"/>
+              </a:lnSpc>
+              <a:buNone/>
+            </a:pPr>
+            <a:r>
+              <a:rPr lang="en-US" sz="1050" dirty="0">
+                <a:solidFill>
+                  <a:srgbClr val="CCCCCC"/>
+                </a:solidFill>
+                <a:latin typeface="Courier New" pitchFamily="34" charset="0"/>
+                <a:ea typeface="Courier New" pitchFamily="34" charset="-122"/>
+                <a:cs typeface="Courier New" pitchFamily="34" charset="-120"/>
+              </a:rPr>
+              <a:t>  </a:t>
+            </a:r>
+            <a:r>
+              <a:rPr lang="en-US" sz="1050" dirty="0">
+                <a:solidFill>
+                  <a:srgbClr val="CCCCCC"/>
+                </a:solidFill>
+                <a:latin typeface="Courier New" pitchFamily="34" charset="0"/>
+                <a:ea typeface="Courier New" pitchFamily="34" charset="-122"/>
+                <a:cs typeface="Courier New" pitchFamily="34" charset="-120"/>
+              </a:rPr>
+              <a:t>i_url</a:t>
+            </a:r>
+            <a:r>
+              <a:rPr lang="en-US" sz="1050" dirty="0">
+                <a:solidFill>
+                  <a:srgbClr val="CCCCCC"/>
+                </a:solidFill>
+                <a:latin typeface="Courier New" pitchFamily="34" charset="0"/>
+                <a:ea typeface="Courier New" pitchFamily="34" charset="-122"/>
+                <a:cs typeface="Courier New" pitchFamily="34" charset="-120"/>
+              </a:rPr>
+              <a:t> </a:t>
+            </a:r>
+            <a:r>
+              <a:rPr lang="en-US" sz="1050" dirty="0">
+                <a:solidFill>
+                  <a:srgbClr val="CCCCCC"/>
+                </a:solidFill>
+                <a:latin typeface="Courier New" pitchFamily="34" charset="0"/>
+                <a:ea typeface="Courier New" pitchFamily="34" charset="-122"/>
+                <a:cs typeface="Courier New" pitchFamily="34" charset="-120"/>
+              </a:rPr>
+              <a:t>=</a:t>
+            </a:r>
+            <a:r>
+              <a:rPr lang="en-US" sz="1050" dirty="0">
+                <a:solidFill>
+                  <a:srgbClr val="CCCCCC"/>
+                </a:solidFill>
+                <a:latin typeface="Courier New" pitchFamily="34" charset="0"/>
+                <a:ea typeface="Courier New" pitchFamily="34" charset="-122"/>
+                <a:cs typeface="Courier New" pitchFamily="34" charset="-120"/>
+              </a:rPr>
+              <a:t> </a:t>
+            </a:r>
+            <a:r>
+              <a:rPr lang="en-US" sz="1050" dirty="0">
+                <a:solidFill>
+                  <a:srgbClr val="CE9178"/>
+                </a:solidFill>
+                <a:latin typeface="Courier New" pitchFamily="34" charset="0"/>
+                <a:ea typeface="Courier New" pitchFamily="34" charset="-122"/>
+                <a:cs typeface="Courier New" pitchFamily="34" charset="-120"/>
+              </a:rPr>
+              <a:t>|{ c_url_base }{ iv_cep }/json/|</a:t>
+            </a:r>
+            <a:r>
+              <a:rPr lang="en-US" sz="1050" dirty="0">
+                <a:solidFill>
+                  <a:srgbClr val="CCCCCC"/>
+                </a:solidFill>
+                <a:latin typeface="Courier New" pitchFamily="34" charset="0"/>
+                <a:ea typeface="Courier New" pitchFamily="34" charset="-122"/>
+                <a:cs typeface="Courier New" pitchFamily="34" charset="-120"/>
+              </a:rPr>
+              <a:t> </a:t>
+            </a:r>
+            <a:r>
+              <a:rPr lang="en-US" sz="1050" dirty="0">
+                <a:solidFill>
+                  <a:srgbClr val="CCCCCC"/>
+                </a:solidFill>
+                <a:latin typeface="Courier New" pitchFamily="34" charset="0"/>
+                <a:ea typeface="Courier New" pitchFamily="34" charset="-122"/>
+                <a:cs typeface="Courier New" pitchFamily="34" charset="-120"/>
+              </a:rPr>
+              <a:t>)</a:t>
+            </a:r>
+            <a:r>
+              <a:rPr lang="en-US" sz="1050" dirty="0">
+                <a:solidFill>
+                  <a:srgbClr val="CCCCCC"/>
+                </a:solidFill>
+                <a:latin typeface="Courier New" pitchFamily="34" charset="0"/>
+                <a:ea typeface="Courier New" pitchFamily="34" charset="-122"/>
+                <a:cs typeface="Courier New" pitchFamily="34" charset="-120"/>
+              </a:rPr>
+              <a:t>.</a:t>
+            </a:r>
+            <a:endParaRPr lang="en-US" sz="1050" dirty="0"/>
+          </a:p>
+          <a:p>
+            <a:pPr indent="0" marL="0">
+              <a:lnSpc>
+                <a:spcPct val="105000"/>
+              </a:lnSpc>
+              <a:buNone/>
+            </a:pPr>
+            <a:r>
+              <a:rPr lang="en-US" sz="1050" dirty="0">
+                <a:solidFill>
+                  <a:srgbClr val="CCCCCC"/>
+                </a:solidFill>
+                <a:latin typeface="Courier New" pitchFamily="34" charset="0"/>
+                <a:ea typeface="Courier New" pitchFamily="34" charset="-122"/>
+                <a:cs typeface="Courier New" pitchFamily="34" charset="-120"/>
+              </a:rPr>
+              <a:t>lo_cliente</a:t>
+            </a:r>
+            <a:r>
+              <a:rPr lang="en-US" sz="1050" dirty="0">
+                <a:solidFill>
+                  <a:srgbClr val="CCCCCC"/>
+                </a:solidFill>
+                <a:latin typeface="Courier New" pitchFamily="34" charset="0"/>
+                <a:ea typeface="Courier New" pitchFamily="34" charset="-122"/>
+                <a:cs typeface="Courier New" pitchFamily="34" charset="-120"/>
+              </a:rPr>
+              <a:t> </a:t>
+            </a:r>
+            <a:r>
+              <a:rPr lang="en-US" sz="1050" dirty="0">
+                <a:solidFill>
+                  <a:srgbClr val="CCCCCC"/>
+                </a:solidFill>
+                <a:latin typeface="Courier New" pitchFamily="34" charset="0"/>
+                <a:ea typeface="Courier New" pitchFamily="34" charset="-122"/>
+                <a:cs typeface="Courier New" pitchFamily="34" charset="-120"/>
+              </a:rPr>
+              <a:t>=</a:t>
+            </a:r>
+            <a:r>
+              <a:rPr lang="en-US" sz="1050" dirty="0">
+                <a:solidFill>
+                  <a:srgbClr val="CCCCCC"/>
+                </a:solidFill>
+                <a:latin typeface="Courier New" pitchFamily="34" charset="0"/>
+                <a:ea typeface="Courier New" pitchFamily="34" charset="-122"/>
+                <a:cs typeface="Courier New" pitchFamily="34" charset="-120"/>
+              </a:rPr>
+              <a:t> </a:t>
+            </a:r>
+            <a:r>
+              <a:rPr lang="en-US" sz="1050" dirty="0">
+                <a:solidFill>
+                  <a:srgbClr val="4EC9B0"/>
+                </a:solidFill>
+                <a:latin typeface="Courier New" pitchFamily="34" charset="0"/>
+                <a:ea typeface="Courier New" pitchFamily="34" charset="-122"/>
+                <a:cs typeface="Courier New" pitchFamily="34" charset="-120"/>
+              </a:rPr>
+              <a:t>cl_web_http_client_manager=&gt;</a:t>
+            </a:r>
+            <a:endParaRPr lang="en-US" sz="1050" dirty="0"/>
+          </a:p>
+          <a:p>
+            <a:pPr indent="0" marL="0">
+              <a:lnSpc>
+                <a:spcPct val="105000"/>
+              </a:lnSpc>
+              <a:buNone/>
+            </a:pPr>
+            <a:r>
+              <a:rPr lang="en-US" sz="1050" dirty="0">
+                <a:solidFill>
+                  <a:srgbClr val="CCCCCC"/>
+                </a:solidFill>
+                <a:latin typeface="Courier New" pitchFamily="34" charset="0"/>
+                <a:ea typeface="Courier New" pitchFamily="34" charset="-122"/>
+                <a:cs typeface="Courier New" pitchFamily="34" charset="-120"/>
+              </a:rPr>
+              <a:t>  </a:t>
+            </a:r>
+            <a:r>
+              <a:rPr lang="en-US" sz="1050" dirty="0">
+                <a:solidFill>
+                  <a:srgbClr val="CCCCCC"/>
+                </a:solidFill>
+                <a:latin typeface="Courier New" pitchFamily="34" charset="0"/>
+                <a:ea typeface="Courier New" pitchFamily="34" charset="-122"/>
+                <a:cs typeface="Courier New" pitchFamily="34" charset="-120"/>
+              </a:rPr>
+              <a:t>create_by_http_destination</a:t>
+            </a:r>
+            <a:r>
+              <a:rPr lang="en-US" sz="1050" dirty="0">
+                <a:solidFill>
+                  <a:srgbClr val="CCCCCC"/>
+                </a:solidFill>
+                <a:latin typeface="Courier New" pitchFamily="34" charset="0"/>
+                <a:ea typeface="Courier New" pitchFamily="34" charset="-122"/>
+                <a:cs typeface="Courier New" pitchFamily="34" charset="-120"/>
+              </a:rPr>
+              <a:t>(</a:t>
+            </a:r>
+            <a:r>
+              <a:rPr lang="en-US" sz="1050" dirty="0">
+                <a:solidFill>
+                  <a:srgbClr val="CCCCCC"/>
+                </a:solidFill>
+                <a:latin typeface="Courier New" pitchFamily="34" charset="0"/>
+                <a:ea typeface="Courier New" pitchFamily="34" charset="-122"/>
+                <a:cs typeface="Courier New" pitchFamily="34" charset="-120"/>
+              </a:rPr>
+              <a:t> </a:t>
+            </a:r>
+            <a:r>
+              <a:rPr lang="en-US" sz="1050" dirty="0">
+                <a:solidFill>
+                  <a:srgbClr val="CCCCCC"/>
+                </a:solidFill>
+                <a:latin typeface="Courier New" pitchFamily="34" charset="0"/>
+                <a:ea typeface="Courier New" pitchFamily="34" charset="-122"/>
+                <a:cs typeface="Courier New" pitchFamily="34" charset="-120"/>
+              </a:rPr>
+              <a:t>lo_destino</a:t>
+            </a:r>
+            <a:r>
+              <a:rPr lang="en-US" sz="1050" dirty="0">
+                <a:solidFill>
+                  <a:srgbClr val="CCCCCC"/>
+                </a:solidFill>
+                <a:latin typeface="Courier New" pitchFamily="34" charset="0"/>
+                <a:ea typeface="Courier New" pitchFamily="34" charset="-122"/>
+                <a:cs typeface="Courier New" pitchFamily="34" charset="-120"/>
+              </a:rPr>
+              <a:t> </a:t>
+            </a:r>
+            <a:r>
+              <a:rPr lang="en-US" sz="1050" dirty="0">
+                <a:solidFill>
+                  <a:srgbClr val="CCCCCC"/>
+                </a:solidFill>
+                <a:latin typeface="Courier New" pitchFamily="34" charset="0"/>
+                <a:ea typeface="Courier New" pitchFamily="34" charset="-122"/>
+                <a:cs typeface="Courier New" pitchFamily="34" charset="-120"/>
+              </a:rPr>
+              <a:t>)</a:t>
+            </a:r>
+            <a:r>
+              <a:rPr lang="en-US" sz="1050" dirty="0">
+                <a:solidFill>
+                  <a:srgbClr val="CCCCCC"/>
+                </a:solidFill>
+                <a:latin typeface="Courier New" pitchFamily="34" charset="0"/>
+                <a:ea typeface="Courier New" pitchFamily="34" charset="-122"/>
+                <a:cs typeface="Courier New" pitchFamily="34" charset="-120"/>
+              </a:rPr>
+              <a:t>.</a:t>
+            </a:r>
+            <a:endParaRPr lang="en-US" sz="1050" dirty="0"/>
+          </a:p>
+          <a:p>
+            <a:pPr indent="0" marL="0">
+              <a:lnSpc>
+                <a:spcPct val="105000"/>
+              </a:lnSpc>
+              <a:buNone/>
+            </a:pPr>
+            <a:r>
+              <a:rPr lang="en-US" sz="1050" dirty="0">
+                <a:solidFill>
+                  <a:srgbClr val="569CD6"/>
+                </a:solidFill>
+                <a:latin typeface="Courier New" pitchFamily="34" charset="0"/>
+                <a:ea typeface="Courier New" pitchFamily="34" charset="-122"/>
+                <a:cs typeface="Courier New" pitchFamily="34" charset="-120"/>
+              </a:rPr>
+              <a:t>DATA</a:t>
+            </a:r>
+            <a:r>
+              <a:rPr lang="en-US" sz="1050" dirty="0">
+                <a:solidFill>
+                  <a:srgbClr val="CCCCCC"/>
+                </a:solidFill>
+                <a:latin typeface="Courier New" pitchFamily="34" charset="0"/>
+                <a:ea typeface="Courier New" pitchFamily="34" charset="-122"/>
+                <a:cs typeface="Courier New" pitchFamily="34" charset="-120"/>
+              </a:rPr>
+              <a:t>(</a:t>
+            </a:r>
+            <a:r>
+              <a:rPr lang="en-US" sz="1050" dirty="0">
+                <a:solidFill>
+                  <a:srgbClr val="CCCCCC"/>
+                </a:solidFill>
+                <a:latin typeface="Courier New" pitchFamily="34" charset="0"/>
+                <a:ea typeface="Courier New" pitchFamily="34" charset="-122"/>
+                <a:cs typeface="Courier New" pitchFamily="34" charset="-120"/>
+              </a:rPr>
+              <a:t>lo_resposta</a:t>
+            </a:r>
+            <a:r>
+              <a:rPr lang="en-US" sz="1050" dirty="0">
+                <a:solidFill>
+                  <a:srgbClr val="CCCCCC"/>
+                </a:solidFill>
+                <a:latin typeface="Courier New" pitchFamily="34" charset="0"/>
+                <a:ea typeface="Courier New" pitchFamily="34" charset="-122"/>
+                <a:cs typeface="Courier New" pitchFamily="34" charset="-120"/>
+              </a:rPr>
+              <a:t>)</a:t>
+            </a:r>
+            <a:r>
+              <a:rPr lang="en-US" sz="1050" dirty="0">
+                <a:solidFill>
+                  <a:srgbClr val="CCCCCC"/>
+                </a:solidFill>
+                <a:latin typeface="Courier New" pitchFamily="34" charset="0"/>
+                <a:ea typeface="Courier New" pitchFamily="34" charset="-122"/>
+                <a:cs typeface="Courier New" pitchFamily="34" charset="-120"/>
+              </a:rPr>
+              <a:t> </a:t>
+            </a:r>
+            <a:r>
+              <a:rPr lang="en-US" sz="1050" dirty="0">
+                <a:solidFill>
+                  <a:srgbClr val="CCCCCC"/>
+                </a:solidFill>
+                <a:latin typeface="Courier New" pitchFamily="34" charset="0"/>
+                <a:ea typeface="Courier New" pitchFamily="34" charset="-122"/>
+                <a:cs typeface="Courier New" pitchFamily="34" charset="-120"/>
+              </a:rPr>
+              <a:t>=</a:t>
+            </a:r>
+            <a:endParaRPr lang="en-US" sz="1050" dirty="0"/>
+          </a:p>
+          <a:p>
+            <a:pPr indent="0" marL="0">
+              <a:lnSpc>
+                <a:spcPct val="105000"/>
+              </a:lnSpc>
+              <a:buNone/>
+            </a:pPr>
+            <a:r>
+              <a:rPr lang="en-US" sz="1050" dirty="0">
+                <a:solidFill>
+                  <a:srgbClr val="CCCCCC"/>
+                </a:solidFill>
+                <a:latin typeface="Courier New" pitchFamily="34" charset="0"/>
+                <a:ea typeface="Courier New" pitchFamily="34" charset="-122"/>
+                <a:cs typeface="Courier New" pitchFamily="34" charset="-120"/>
+              </a:rPr>
+              <a:t>  </a:t>
+            </a:r>
+            <a:r>
+              <a:rPr lang="en-US" sz="1050" dirty="0">
+                <a:solidFill>
+                  <a:srgbClr val="CCCCCC"/>
+                </a:solidFill>
+                <a:latin typeface="Courier New" pitchFamily="34" charset="0"/>
+                <a:ea typeface="Courier New" pitchFamily="34" charset="-122"/>
+                <a:cs typeface="Courier New" pitchFamily="34" charset="-120"/>
+              </a:rPr>
+              <a:t>lo_cliente-</a:t>
+            </a:r>
+            <a:r>
+              <a:rPr lang="en-US" sz="1050" dirty="0">
+                <a:solidFill>
+                  <a:srgbClr val="CCCCCC"/>
+                </a:solidFill>
+                <a:latin typeface="Courier New" pitchFamily="34" charset="0"/>
+                <a:ea typeface="Courier New" pitchFamily="34" charset="-122"/>
+                <a:cs typeface="Courier New" pitchFamily="34" charset="-120"/>
+              </a:rPr>
+              <a:t>&gt;</a:t>
+            </a:r>
+            <a:r>
+              <a:rPr lang="en-US" sz="1050" dirty="0">
+                <a:solidFill>
+                  <a:srgbClr val="CCCCCC"/>
+                </a:solidFill>
+                <a:latin typeface="Courier New" pitchFamily="34" charset="0"/>
+                <a:ea typeface="Courier New" pitchFamily="34" charset="-122"/>
+                <a:cs typeface="Courier New" pitchFamily="34" charset="-120"/>
+              </a:rPr>
+              <a:t>execute</a:t>
+            </a:r>
+            <a:r>
+              <a:rPr lang="en-US" sz="1050" dirty="0">
+                <a:solidFill>
+                  <a:srgbClr val="CCCCCC"/>
+                </a:solidFill>
+                <a:latin typeface="Courier New" pitchFamily="34" charset="0"/>
+                <a:ea typeface="Courier New" pitchFamily="34" charset="-122"/>
+                <a:cs typeface="Courier New" pitchFamily="34" charset="-120"/>
+              </a:rPr>
+              <a:t>(</a:t>
+            </a:r>
+            <a:r>
+              <a:rPr lang="en-US" sz="1050" dirty="0">
+                <a:solidFill>
+                  <a:srgbClr val="CCCCCC"/>
+                </a:solidFill>
+                <a:latin typeface="Courier New" pitchFamily="34" charset="0"/>
+                <a:ea typeface="Courier New" pitchFamily="34" charset="-122"/>
+                <a:cs typeface="Courier New" pitchFamily="34" charset="-120"/>
+              </a:rPr>
+              <a:t> </a:t>
+            </a:r>
+            <a:r>
+              <a:rPr lang="en-US" sz="1050" dirty="0">
+                <a:solidFill>
+                  <a:srgbClr val="4EC9B0"/>
+                </a:solidFill>
+                <a:latin typeface="Courier New" pitchFamily="34" charset="0"/>
+                <a:ea typeface="Courier New" pitchFamily="34" charset="-122"/>
+                <a:cs typeface="Courier New" pitchFamily="34" charset="-120"/>
+              </a:rPr>
+              <a:t>if_web_http_client=&gt;</a:t>
+            </a:r>
+            <a:r>
+              <a:rPr lang="en-US" sz="1050" dirty="0">
+                <a:solidFill>
+                  <a:srgbClr val="CCCCCC"/>
+                </a:solidFill>
+                <a:latin typeface="Courier New" pitchFamily="34" charset="0"/>
+                <a:ea typeface="Courier New" pitchFamily="34" charset="-122"/>
+                <a:cs typeface="Courier New" pitchFamily="34" charset="-120"/>
+              </a:rPr>
+              <a:t>get</a:t>
+            </a:r>
+            <a:r>
+              <a:rPr lang="en-US" sz="1050" dirty="0">
+                <a:solidFill>
+                  <a:srgbClr val="CCCCCC"/>
+                </a:solidFill>
+                <a:latin typeface="Courier New" pitchFamily="34" charset="0"/>
+                <a:ea typeface="Courier New" pitchFamily="34" charset="-122"/>
+                <a:cs typeface="Courier New" pitchFamily="34" charset="-120"/>
+              </a:rPr>
+              <a:t> </a:t>
+            </a:r>
+            <a:r>
+              <a:rPr lang="en-US" sz="1050" dirty="0">
+                <a:solidFill>
+                  <a:srgbClr val="CCCCCC"/>
+                </a:solidFill>
+                <a:latin typeface="Courier New" pitchFamily="34" charset="0"/>
+                <a:ea typeface="Courier New" pitchFamily="34" charset="-122"/>
+                <a:cs typeface="Courier New" pitchFamily="34" charset="-120"/>
+              </a:rPr>
+              <a:t>)</a:t>
+            </a:r>
+            <a:r>
+              <a:rPr lang="en-US" sz="1050" dirty="0">
+                <a:solidFill>
+                  <a:srgbClr val="CCCCCC"/>
+                </a:solidFill>
+                <a:latin typeface="Courier New" pitchFamily="34" charset="0"/>
+                <a:ea typeface="Courier New" pitchFamily="34" charset="-122"/>
+                <a:cs typeface="Courier New" pitchFamily="34" charset="-120"/>
+              </a:rPr>
+              <a:t>.</a:t>
+            </a:r>
+            <a:endParaRPr lang="en-US" sz="1050" dirty="0"/>
+          </a:p>
+        </p:txBody>
+      </p:sp>
+      <p:sp>
+        <p:nvSpPr>
+          <p:cNvPr id="13" name="Text 11"/>
+          <p:cNvSpPr txBox="1"/>
+          <p:nvPr/>
+        </p:nvSpPr>
+        <p:spPr>
+          <a:xfrm>
+            <a:off x="548640" y="4151376"/>
+            <a:ext cx="5410048" cy="2020824"/>
+          </a:xfrm>
+          <a:prstGeom prst="rect">
+            <a:avLst/>
+          </a:prstGeom>
+          <a:noFill/>
+          <a:ln/>
+        </p:spPr>
+        <p:txBody>
+          <a:bodyPr wrap="square" lIns="0" tIns="0" rIns="0" bIns="0" rtlCol="0" anchor="t"/>
+          <a:lstStyle/>
+          <a:p>
+            <a:pPr indent="0" marL="0">
+              <a:buNone/>
+            </a:pPr>
+            <a:r>
+              <a:rPr lang="en-US" sz="1200" dirty="0">
+                <a:solidFill>
+                  <a:srgbClr val="556B82"/>
+                </a:solidFill>
+              </a:rPr>
+              <a:t>Só APIs liberadas. Em produção, </a:t>
+            </a:r>
+            <a:r>
+              <a:rPr lang="en-US" sz="1200" dirty="0">
+                <a:solidFill>
+                  <a:srgbClr val="0064D9"/>
+                </a:solidFill>
+                <a:latin typeface="Courier New" pitchFamily="34" charset="0"/>
+                <a:ea typeface="Courier New" pitchFamily="34" charset="-122"/>
+                <a:cs typeface="Courier New" pitchFamily="34" charset="-120"/>
+              </a:rPr>
+              <a:t>create_by_comm_arrangement</a:t>
+            </a:r>
+            <a:r>
+              <a:rPr lang="en-US" sz="1200" dirty="0">
+                <a:solidFill>
+                  <a:srgbClr val="556B82"/>
+                </a:solidFill>
+              </a:rPr>
+              <a:t> troca a URL fixa por um Communication Arrangement.</a:t>
+            </a:r>
+            <a:endParaRPr lang="en-US" sz="1400" dirty="0"/>
+          </a:p>
+        </p:txBody>
+      </p:sp>
+      <p:sp>
+        <p:nvSpPr>
+          <p:cNvPr id="14" name="Shape 12"/>
           <p:cNvSpPr/>
           <p:nvPr/>
         </p:nvSpPr>
         <p:spPr>
           <a:xfrm>
-            <a:off x="548640" y="3177540"/>
-            <a:ext cx="2622728" cy="1581912"/>
+            <a:off x="6233008" y="1645920"/>
+            <a:ext cx="2457907" cy="274320"/>
           </a:xfrm>
           <a:prstGeom prst="roundRect">
             <a:avLst>
-              <a:gd name="adj" fmla="val 5780"/>
+              <a:gd name="adj" fmla="val 50000"/>
             </a:avLst>
           </a:prstGeom>
           <a:solidFill>
-            <a:srgbClr val="FFFFFF"/>
+            <a:srgbClr val="FFF8D6"/>
           </a:solidFill>
-          <a:ln w="9525">
-            <a:solidFill>
-              <a:srgbClr val="E5E5E5"/>
-            </a:solidFill>
-            <a:prstDash val="solid"/>
-          </a:ln>
+          <a:ln/>
+        </p:spPr>
+      </p:sp>
+      <p:sp>
+        <p:nvSpPr>
+          <p:cNvPr id="15" name="Text 13"/>
+          <p:cNvSpPr txBox="1"/>
+          <p:nvPr/>
+        </p:nvSpPr>
+        <p:spPr>
+          <a:xfrm>
+            <a:off x="6233008" y="1645920"/>
+            <a:ext cx="2457907" cy="274320"/>
+          </a:xfrm>
+          <a:prstGeom prst="rect">
+            <a:avLst/>
+          </a:prstGeom>
+          <a:noFill/>
+          <a:ln/>
+        </p:spPr>
+        <p:txBody>
+          <a:bodyPr wrap="square" lIns="0" tIns="0" rIns="0" bIns="0" rtlCol="0" anchor="ctr"/>
+          <a:lstStyle/>
+          <a:p>
+            <a:pPr algn="ctr" indent="0" marL="0">
+              <a:buNone/>
+            </a:pPr>
+            <a:r>
+              <a:rPr lang="en-US" sz="1000" b="1" dirty="0">
+                <a:solidFill>
+                  <a:srgbClr val="B44F00"/>
+                </a:solidFill>
+              </a:rPr>
+              <a:t>On-Premise · Standard ABAP</a:t>
+            </a:r>
+            <a:endParaRPr lang="en-US" sz="1000" dirty="0"/>
+          </a:p>
+        </p:txBody>
+      </p:sp>
+      <p:sp>
+        <p:nvSpPr>
+          <p:cNvPr id="16" name="Shape 14"/>
+          <p:cNvSpPr/>
+          <p:nvPr/>
+        </p:nvSpPr>
+        <p:spPr>
+          <a:xfrm>
+            <a:off x="6233008" y="2029968"/>
+            <a:ext cx="5410048" cy="2002536"/>
+          </a:xfrm>
+          <a:prstGeom prst="roundRect">
+            <a:avLst>
+              <a:gd name="adj" fmla="val 3653"/>
+            </a:avLst>
+          </a:prstGeom>
+          <a:solidFill>
+            <a:srgbClr val="1F1F1F"/>
+          </a:solidFill>
+          <a:ln/>
           <a:effectLst>
-            <a:outerShdw sx="100000" sy="100000" kx="0" ky="0" algn="bl" rotWithShape="0" blurRad="63500" dist="12700" dir="5400000">
-              <a:srgbClr val="1D2D3E">
-                <a:alpha val="8000"/>
+            <a:outerShdw sx="100000" sy="100000" kx="0" ky="0" algn="bl" rotWithShape="0" blurRad="76200" dist="25400" dir="5400000">
+              <a:srgbClr val="000000">
+                <a:alpha val="18000"/>
               </a:srgbClr>
             </a:outerShdw>
           </a:effectLst>
@@ -8135,104 +9193,56 @@
       </p:sp>
       <p:sp>
         <p:nvSpPr>
-          <p:cNvPr id="8" name="Text 6"/>
-          <p:cNvSpPr txBox="1"/>
-          <p:nvPr/>
-        </p:nvSpPr>
-        <p:spPr>
-          <a:xfrm>
-            <a:off x="731520" y="3360420"/>
-            <a:ext cx="1845488" cy="1261872"/>
-          </a:xfrm>
-          <a:prstGeom prst="rect">
-            <a:avLst/>
-          </a:prstGeom>
-          <a:noFill/>
-          <a:ln/>
-        </p:spPr>
-        <p:txBody>
-          <a:bodyPr wrap="square" lIns="0" tIns="0" rIns="0" bIns="0" rtlCol="0" anchor="t"/>
-          <a:lstStyle/>
-          <a:p>
-            <a:pPr indent="0" marL="0">
-              <a:spcAft>
-                <a:spcPts val="600"/>
-              </a:spcAft>
-              <a:buNone/>
-            </a:pPr>
-            <a:r>
-              <a:rPr lang="en-US" sz="1350" b="1" dirty="0">
-                <a:solidFill>
-                  <a:srgbClr val="1D2D3E"/>
-                </a:solidFill>
-              </a:rPr>
-              <a:t>Evaluate</a:t>
-            </a:r>
-            <a:endParaRPr lang="en-US" sz="1400" dirty="0"/>
-          </a:p>
-          <a:p>
-            <a:pPr indent="0" marL="0">
-              <a:buNone/>
-            </a:pPr>
-            <a:r>
-              <a:rPr lang="en-US" sz="1150" dirty="0">
-                <a:solidFill>
-                  <a:srgbClr val="556B82"/>
-                </a:solidFill>
-              </a:rPr>
-              <a:t>ABAP call monitor (</a:t>
-            </a:r>
-            <a:r>
-              <a:rPr lang="en-US" sz="1150" dirty="0">
-                <a:solidFill>
-                  <a:srgbClr val="0064D9"/>
-                </a:solidFill>
-                <a:latin typeface="Courier New" pitchFamily="34" charset="0"/>
-                <a:ea typeface="Courier New" pitchFamily="34" charset="-122"/>
-                <a:cs typeface="Courier New" pitchFamily="34" charset="-120"/>
-              </a:rPr>
-              <a:t>SCMON</a:t>
-            </a:r>
-            <a:r>
-              <a:rPr lang="en-US" sz="1150" dirty="0">
-                <a:solidFill>
-                  <a:srgbClr val="556B82"/>
-                </a:solidFill>
-              </a:rPr>
-              <a:t>) e app </a:t>
-            </a:r>
-            <a:r>
-              <a:rPr lang="en-US" sz="1150" b="1" dirty="0">
-                <a:solidFill>
-                  <a:srgbClr val="556B82"/>
-                </a:solidFill>
-              </a:rPr>
-              <a:t>Custom Code Migration</a:t>
-            </a:r>
-            <a:r>
-              <a:rPr lang="en-US" sz="1150" dirty="0">
-                <a:solidFill>
-                  <a:srgbClr val="556B82"/>
-                </a:solidFill>
-              </a:rPr>
-              <a:t>.</a:t>
-            </a:r>
-            <a:endParaRPr lang="en-US" sz="1400" dirty="0"/>
-          </a:p>
-        </p:txBody>
-      </p:sp>
-      <p:sp>
-        <p:nvSpPr>
-          <p:cNvPr id="9" name="Shape 7"/>
+          <p:cNvPr id="17" name="Shape 15"/>
           <p:cNvSpPr/>
           <p:nvPr/>
         </p:nvSpPr>
         <p:spPr>
           <a:xfrm>
-            <a:off x="4336428" y="2308860"/>
-            <a:ext cx="694944" cy="694944"/>
-          </a:xfrm>
-          <a:prstGeom prst="ellipse">
+            <a:off x="6251296" y="2048256"/>
+            <a:ext cx="5373472" cy="329184"/>
+          </a:xfrm>
+          <a:prstGeom prst="rect">
+            <a:avLst/>
+          </a:prstGeom>
+          <a:solidFill>
+            <a:srgbClr val="2B2B2B"/>
+          </a:solidFill>
+          <a:ln/>
+        </p:spPr>
+      </p:sp>
+      <p:sp>
+        <p:nvSpPr>
+          <p:cNvPr id="18" name="Shape 16"/>
+          <p:cNvSpPr/>
+          <p:nvPr/>
+        </p:nvSpPr>
+        <p:spPr>
+          <a:xfrm>
+            <a:off x="6324448" y="2084832"/>
+            <a:ext cx="3008376" cy="292608"/>
+          </a:xfrm>
+          <a:prstGeom prst="rect">
+            <a:avLst/>
+          </a:prstGeom>
+          <a:solidFill>
+            <a:srgbClr val="1F1F1F"/>
+          </a:solidFill>
+          <a:ln/>
+        </p:spPr>
+      </p:sp>
+      <p:sp>
+        <p:nvSpPr>
+          <p:cNvPr id="19" name="Shape 17"/>
+          <p:cNvSpPr/>
+          <p:nvPr/>
+        </p:nvSpPr>
+        <p:spPr>
+          <a:xfrm>
+            <a:off x="6324448" y="2084832"/>
+            <a:ext cx="3008376" cy="27432"/>
+          </a:xfrm>
+          <a:prstGeom prst="rect">
             <a:avLst/>
           </a:prstGeom>
           <a:solidFill>
@@ -8243,14 +9253,14 @@
       </p:sp>
       <p:sp>
         <p:nvSpPr>
-          <p:cNvPr id="10" name="Text 8"/>
+          <p:cNvPr id="20" name="Text 18"/>
           <p:cNvSpPr txBox="1"/>
           <p:nvPr/>
         </p:nvSpPr>
         <p:spPr>
           <a:xfrm>
-            <a:off x="4336428" y="2308860"/>
-            <a:ext cx="694944" cy="694944"/>
+            <a:off x="6415888" y="2103120"/>
+            <a:ext cx="2825496" cy="274320"/>
           </a:xfrm>
           <a:prstGeom prst="rect">
             <a:avLst/>
@@ -8262,65 +9272,31 @@
           <a:bodyPr wrap="square" lIns="0" tIns="0" rIns="0" bIns="0" rtlCol="0" anchor="ctr"/>
           <a:lstStyle/>
           <a:p>
-            <a:pPr algn="ctr" indent="0" marL="0">
-              <a:buNone/>
-            </a:pPr>
-            <a:r>
-              <a:rPr lang="en-US" sz="2280" b="1" dirty="0">
+            <a:pPr indent="0" marL="0">
+              <a:buNone/>
+            </a:pPr>
+            <a:r>
+              <a:rPr lang="en-US" sz="950" dirty="0">
                 <a:solidFill>
                   <a:srgbClr val="FFFFFF"/>
                 </a:solidFill>
               </a:rPr>
-              <a:t>2</a:t>
-            </a:r>
-            <a:endParaRPr lang="en-US" sz="2280" dirty="0"/>
-          </a:p>
-        </p:txBody>
-      </p:sp>
-      <p:sp>
-        <p:nvSpPr>
-          <p:cNvPr id="11" name="Shape 9"/>
-          <p:cNvSpPr/>
-          <p:nvPr/>
-        </p:nvSpPr>
-        <p:spPr>
-          <a:xfrm>
-            <a:off x="3372536" y="3177540"/>
-            <a:ext cx="2622728" cy="1581912"/>
-          </a:xfrm>
-          <a:prstGeom prst="roundRect">
-            <a:avLst>
-              <a:gd name="adj" fmla="val 5780"/>
-            </a:avLst>
-          </a:prstGeom>
-          <a:solidFill>
-            <a:srgbClr val="FFFFFF"/>
-          </a:solidFill>
-          <a:ln w="9525">
-            <a:solidFill>
-              <a:srgbClr val="E5E5E5"/>
-            </a:solidFill>
-            <a:prstDash val="solid"/>
-          </a:ln>
-          <a:effectLst>
-            <a:outerShdw sx="100000" sy="100000" kx="0" ky="0" algn="bl" rotWithShape="0" blurRad="63500" dist="12700" dir="5400000">
-              <a:srgbClr val="1D2D3E">
-                <a:alpha val="8000"/>
-              </a:srgbClr>
-            </a:outerShdw>
-          </a:effectLst>
-        </p:spPr>
-      </p:sp>
-      <p:sp>
-        <p:nvSpPr>
-          <p:cNvPr id="12" name="Text 10"/>
+              <a:t>zcl_pc_viacep.clas.abap (pasta T2)</a:t>
+            </a:r>
+            <a:endParaRPr lang="en-US" sz="950" dirty="0"/>
+          </a:p>
+        </p:txBody>
+      </p:sp>
+      <p:sp>
+        <p:nvSpPr>
+          <p:cNvPr id="21" name="Text 19"/>
           <p:cNvSpPr txBox="1"/>
           <p:nvPr/>
         </p:nvSpPr>
         <p:spPr>
           <a:xfrm>
-            <a:off x="3555416" y="3360420"/>
-            <a:ext cx="1845488" cy="1261872"/>
+            <a:off x="6370168" y="2487168"/>
+            <a:ext cx="320040" cy="1453896"/>
           </a:xfrm>
           <a:prstGeom prst="rect">
             <a:avLst/>
@@ -8332,138 +9308,117 @@
           <a:bodyPr wrap="square" lIns="0" tIns="0" rIns="0" bIns="0" rtlCol="0" anchor="t"/>
           <a:lstStyle/>
           <a:p>
-            <a:pPr indent="0" marL="0">
-              <a:spcAft>
-                <a:spcPts val="600"/>
-              </a:spcAft>
-              <a:buNone/>
-            </a:pPr>
-            <a:r>
-              <a:rPr lang="en-US" sz="1350" b="1" dirty="0">
-                <a:solidFill>
-                  <a:srgbClr val="1D2D3E"/>
-                </a:solidFill>
-              </a:rPr>
-              <a:t>Adapt</a:t>
-            </a:r>
-            <a:endParaRPr lang="en-US" sz="1400" dirty="0"/>
-          </a:p>
-          <a:p>
-            <a:pPr indent="0" marL="0">
-              <a:buNone/>
-            </a:pPr>
-            <a:r>
-              <a:rPr lang="en-US" sz="1150" dirty="0">
-                <a:solidFill>
-                  <a:srgbClr val="556B82"/>
-                </a:solidFill>
-              </a:rPr>
-              <a:t>Quick fixes no ADT e ajustes manuais onde não há automação.</a:t>
-            </a:r>
-            <a:endParaRPr lang="en-US" sz="1400" dirty="0"/>
-          </a:p>
-        </p:txBody>
-      </p:sp>
-      <p:sp>
-        <p:nvSpPr>
-          <p:cNvPr id="13" name="Shape 11"/>
-          <p:cNvSpPr/>
-          <p:nvPr/>
-        </p:nvSpPr>
-        <p:spPr>
-          <a:xfrm>
-            <a:off x="7160324" y="2308860"/>
-            <a:ext cx="694944" cy="694944"/>
-          </a:xfrm>
-          <a:prstGeom prst="ellipse">
-            <a:avLst/>
-          </a:prstGeom>
-          <a:solidFill>
-            <a:srgbClr val="0070F2"/>
-          </a:solidFill>
-          <a:ln/>
-        </p:spPr>
-      </p:sp>
-      <p:sp>
-        <p:nvSpPr>
-          <p:cNvPr id="14" name="Text 12"/>
+            <a:pPr algn="r" indent="0" marL="0">
+              <a:lnSpc>
+                <a:spcPct val="105000"/>
+              </a:lnSpc>
+              <a:buNone/>
+            </a:pPr>
+            <a:r>
+              <a:rPr lang="en-US" sz="1050" dirty="0">
+                <a:solidFill>
+                  <a:srgbClr val="6E7681"/>
+                </a:solidFill>
+                <a:latin typeface="Courier New" pitchFamily="34" charset="0"/>
+                <a:ea typeface="Courier New" pitchFamily="34" charset="-122"/>
+                <a:cs typeface="Courier New" pitchFamily="34" charset="-120"/>
+              </a:rPr>
+              <a:t>1</a:t>
+            </a:r>
+            <a:endParaRPr lang="en-US" sz="1050" dirty="0"/>
+          </a:p>
+          <a:p>
+            <a:pPr algn="r" indent="0" marL="0">
+              <a:lnSpc>
+                <a:spcPct val="105000"/>
+              </a:lnSpc>
+              <a:buNone/>
+            </a:pPr>
+            <a:r>
+              <a:rPr lang="en-US" sz="1050" dirty="0">
+                <a:solidFill>
+                  <a:srgbClr val="6E7681"/>
+                </a:solidFill>
+                <a:latin typeface="Courier New" pitchFamily="34" charset="0"/>
+                <a:ea typeface="Courier New" pitchFamily="34" charset="-122"/>
+                <a:cs typeface="Courier New" pitchFamily="34" charset="-120"/>
+              </a:rPr>
+              <a:t>2</a:t>
+            </a:r>
+            <a:endParaRPr lang="en-US" sz="1050" dirty="0"/>
+          </a:p>
+          <a:p>
+            <a:pPr algn="r" indent="0" marL="0">
+              <a:lnSpc>
+                <a:spcPct val="105000"/>
+              </a:lnSpc>
+              <a:buNone/>
+            </a:pPr>
+            <a:r>
+              <a:rPr lang="en-US" sz="1050" dirty="0">
+                <a:solidFill>
+                  <a:srgbClr val="6E7681"/>
+                </a:solidFill>
+                <a:latin typeface="Courier New" pitchFamily="34" charset="0"/>
+                <a:ea typeface="Courier New" pitchFamily="34" charset="-122"/>
+                <a:cs typeface="Courier New" pitchFamily="34" charset="-120"/>
+              </a:rPr>
+              <a:t>3</a:t>
+            </a:r>
+            <a:endParaRPr lang="en-US" sz="1050" dirty="0"/>
+          </a:p>
+          <a:p>
+            <a:pPr algn="r" indent="0" marL="0">
+              <a:lnSpc>
+                <a:spcPct val="105000"/>
+              </a:lnSpc>
+              <a:buNone/>
+            </a:pPr>
+            <a:r>
+              <a:rPr lang="en-US" sz="1050" dirty="0">
+                <a:solidFill>
+                  <a:srgbClr val="6E7681"/>
+                </a:solidFill>
+                <a:latin typeface="Courier New" pitchFamily="34" charset="0"/>
+                <a:ea typeface="Courier New" pitchFamily="34" charset="-122"/>
+                <a:cs typeface="Courier New" pitchFamily="34" charset="-120"/>
+              </a:rPr>
+              <a:t>4</a:t>
+            </a:r>
+            <a:endParaRPr lang="en-US" sz="1050" dirty="0"/>
+          </a:p>
+          <a:p>
+            <a:pPr algn="r" indent="0" marL="0">
+              <a:lnSpc>
+                <a:spcPct val="105000"/>
+              </a:lnSpc>
+              <a:buNone/>
+            </a:pPr>
+            <a:r>
+              <a:rPr lang="en-US" sz="1050" dirty="0">
+                <a:solidFill>
+                  <a:srgbClr val="6E7681"/>
+                </a:solidFill>
+                <a:latin typeface="Courier New" pitchFamily="34" charset="0"/>
+                <a:ea typeface="Courier New" pitchFamily="34" charset="-122"/>
+                <a:cs typeface="Courier New" pitchFamily="34" charset="-120"/>
+              </a:rPr>
+              <a:t>5</a:t>
+            </a:r>
+            <a:endParaRPr lang="en-US" sz="1050" dirty="0"/>
+          </a:p>
+        </p:txBody>
+      </p:sp>
+      <p:sp>
+        <p:nvSpPr>
+          <p:cNvPr id="22" name="Text 20"/>
           <p:cNvSpPr txBox="1"/>
           <p:nvPr/>
         </p:nvSpPr>
         <p:spPr>
           <a:xfrm>
-            <a:off x="7160324" y="2308860"/>
-            <a:ext cx="694944" cy="694944"/>
-          </a:xfrm>
-          <a:prstGeom prst="rect">
-            <a:avLst/>
-          </a:prstGeom>
-          <a:noFill/>
-          <a:ln/>
-        </p:spPr>
-        <p:txBody>
-          <a:bodyPr wrap="square" lIns="0" tIns="0" rIns="0" bIns="0" rtlCol="0" anchor="ctr"/>
-          <a:lstStyle/>
-          <a:p>
-            <a:pPr algn="ctr" indent="0" marL="0">
-              <a:buNone/>
-            </a:pPr>
-            <a:r>
-              <a:rPr lang="en-US" sz="2280" b="1" dirty="0">
-                <a:solidFill>
-                  <a:srgbClr val="FFFFFF"/>
-                </a:solidFill>
-              </a:rPr>
-              <a:t>3</a:t>
-            </a:r>
-            <a:endParaRPr lang="en-US" sz="2280" dirty="0"/>
-          </a:p>
-        </p:txBody>
-      </p:sp>
-      <p:sp>
-        <p:nvSpPr>
-          <p:cNvPr id="15" name="Shape 13"/>
-          <p:cNvSpPr/>
-          <p:nvPr/>
-        </p:nvSpPr>
-        <p:spPr>
-          <a:xfrm>
-            <a:off x="6196432" y="3177540"/>
-            <a:ext cx="2622728" cy="1581912"/>
-          </a:xfrm>
-          <a:prstGeom prst="roundRect">
-            <a:avLst>
-              <a:gd name="adj" fmla="val 5780"/>
-            </a:avLst>
-          </a:prstGeom>
-          <a:solidFill>
-            <a:srgbClr val="FFFFFF"/>
-          </a:solidFill>
-          <a:ln w="9525">
-            <a:solidFill>
-              <a:srgbClr val="E5E5E5"/>
-            </a:solidFill>
-            <a:prstDash val="solid"/>
-          </a:ln>
-          <a:effectLst>
-            <a:outerShdw sx="100000" sy="100000" kx="0" ky="0" algn="bl" rotWithShape="0" blurRad="63500" dist="12700" dir="5400000">
-              <a:srgbClr val="1D2D3E">
-                <a:alpha val="8000"/>
-              </a:srgbClr>
-            </a:outerShdw>
-          </a:effectLst>
-        </p:spPr>
-      </p:sp>
-      <p:sp>
-        <p:nvSpPr>
-          <p:cNvPr id="16" name="Text 14"/>
-          <p:cNvSpPr txBox="1"/>
-          <p:nvPr/>
-        </p:nvSpPr>
-        <p:spPr>
-          <a:xfrm>
-            <a:off x="6379312" y="3360420"/>
-            <a:ext cx="1845488" cy="1261872"/>
+            <a:off x="6735928" y="2487168"/>
+            <a:ext cx="4769968" cy="1453896"/>
           </a:xfrm>
           <a:prstGeom prst="rect">
             <a:avLst/>
@@ -8476,137 +9431,479 @@
           <a:lstStyle/>
           <a:p>
             <a:pPr indent="0" marL="0">
-              <a:spcAft>
-                <a:spcPts val="600"/>
-              </a:spcAft>
-              <a:buNone/>
-            </a:pPr>
-            <a:r>
-              <a:rPr lang="en-US" sz="1350" b="1" dirty="0">
-                <a:solidFill>
-                  <a:srgbClr val="1D2D3E"/>
-                </a:solidFill>
-              </a:rPr>
-              <a:t>Review</a:t>
-            </a:r>
-            <a:endParaRPr lang="en-US" sz="1400" dirty="0"/>
+              <a:lnSpc>
+                <a:spcPct val="105000"/>
+              </a:lnSpc>
+              <a:buNone/>
+            </a:pPr>
+            <a:r>
+              <a:rPr lang="en-US" sz="1050" dirty="0">
+                <a:solidFill>
+                  <a:srgbClr val="4EC9B0"/>
+                </a:solidFill>
+                <a:latin typeface="Courier New" pitchFamily="34" charset="0"/>
+                <a:ea typeface="Courier New" pitchFamily="34" charset="-122"/>
+                <a:cs typeface="Courier New" pitchFamily="34" charset="-120"/>
+              </a:rPr>
+              <a:t>cl_http_client=&gt;</a:t>
+            </a:r>
+            <a:r>
+              <a:rPr lang="en-US" sz="1050" dirty="0">
+                <a:solidFill>
+                  <a:srgbClr val="CCCCCC"/>
+                </a:solidFill>
+                <a:latin typeface="Courier New" pitchFamily="34" charset="0"/>
+                <a:ea typeface="Courier New" pitchFamily="34" charset="-122"/>
+                <a:cs typeface="Courier New" pitchFamily="34" charset="-120"/>
+              </a:rPr>
+              <a:t>create_by_destination</a:t>
+            </a:r>
+            <a:r>
+              <a:rPr lang="en-US" sz="1050" dirty="0">
+                <a:solidFill>
+                  <a:srgbClr val="CCCCCC"/>
+                </a:solidFill>
+                <a:latin typeface="Courier New" pitchFamily="34" charset="0"/>
+                <a:ea typeface="Courier New" pitchFamily="34" charset="-122"/>
+                <a:cs typeface="Courier New" pitchFamily="34" charset="-120"/>
+              </a:rPr>
+              <a:t>(</a:t>
+            </a:r>
+            <a:endParaRPr lang="en-US" sz="1050" dirty="0"/>
           </a:p>
           <a:p>
             <a:pPr indent="0" marL="0">
-              <a:buNone/>
-            </a:pPr>
-            <a:r>
-              <a:rPr lang="en-US" sz="1150" dirty="0">
-                <a:solidFill>
-                  <a:srgbClr val="556B82"/>
-                </a:solidFill>
-              </a:rPr>
-              <a:t>Modificações obsoletas, não usadas, irrelevantes ou substituíveis.</a:t>
-            </a:r>
-            <a:endParaRPr lang="en-US" sz="1400" dirty="0"/>
-          </a:p>
-        </p:txBody>
-      </p:sp>
-      <p:sp>
-        <p:nvSpPr>
-          <p:cNvPr id="17" name="Shape 15"/>
-          <p:cNvSpPr/>
-          <p:nvPr/>
-        </p:nvSpPr>
-        <p:spPr>
-          <a:xfrm>
-            <a:off x="9984219" y="2308860"/>
-            <a:ext cx="694944" cy="694944"/>
-          </a:xfrm>
-          <a:prstGeom prst="ellipse">
-            <a:avLst/>
-          </a:prstGeom>
-          <a:solidFill>
-            <a:srgbClr val="0070F2"/>
-          </a:solidFill>
-          <a:ln/>
-        </p:spPr>
-      </p:sp>
-      <p:sp>
-        <p:nvSpPr>
-          <p:cNvPr id="18" name="Text 16"/>
+              <a:lnSpc>
+                <a:spcPct val="105000"/>
+              </a:lnSpc>
+              <a:buNone/>
+            </a:pPr>
+            <a:r>
+              <a:rPr lang="en-US" sz="1050" dirty="0">
+                <a:solidFill>
+                  <a:srgbClr val="CCCCCC"/>
+                </a:solidFill>
+                <a:latin typeface="Courier New" pitchFamily="34" charset="0"/>
+                <a:ea typeface="Courier New" pitchFamily="34" charset="-122"/>
+                <a:cs typeface="Courier New" pitchFamily="34" charset="-120"/>
+              </a:rPr>
+              <a:t>  </a:t>
+            </a:r>
+            <a:r>
+              <a:rPr lang="en-US" sz="1050" dirty="0">
+                <a:solidFill>
+                  <a:srgbClr val="569CD6"/>
+                </a:solidFill>
+                <a:latin typeface="Courier New" pitchFamily="34" charset="0"/>
+                <a:ea typeface="Courier New" pitchFamily="34" charset="-122"/>
+                <a:cs typeface="Courier New" pitchFamily="34" charset="-120"/>
+              </a:rPr>
+              <a:t>EXPORTING</a:t>
+            </a:r>
+            <a:r>
+              <a:rPr lang="en-US" sz="1050" dirty="0">
+                <a:solidFill>
+                  <a:srgbClr val="CCCCCC"/>
+                </a:solidFill>
+                <a:latin typeface="Courier New" pitchFamily="34" charset="0"/>
+                <a:ea typeface="Courier New" pitchFamily="34" charset="-122"/>
+                <a:cs typeface="Courier New" pitchFamily="34" charset="-120"/>
+              </a:rPr>
+              <a:t>  </a:t>
+            </a:r>
+            <a:r>
+              <a:rPr lang="en-US" sz="1050" dirty="0">
+                <a:solidFill>
+                  <a:srgbClr val="CCCCCC"/>
+                </a:solidFill>
+                <a:latin typeface="Courier New" pitchFamily="34" charset="0"/>
+                <a:ea typeface="Courier New" pitchFamily="34" charset="-122"/>
+                <a:cs typeface="Courier New" pitchFamily="34" charset="-120"/>
+              </a:rPr>
+              <a:t>destination</a:t>
+            </a:r>
+            <a:r>
+              <a:rPr lang="en-US" sz="1050" dirty="0">
+                <a:solidFill>
+                  <a:srgbClr val="CCCCCC"/>
+                </a:solidFill>
+                <a:latin typeface="Courier New" pitchFamily="34" charset="0"/>
+                <a:ea typeface="Courier New" pitchFamily="34" charset="-122"/>
+                <a:cs typeface="Courier New" pitchFamily="34" charset="-120"/>
+              </a:rPr>
+              <a:t> </a:t>
+            </a:r>
+            <a:r>
+              <a:rPr lang="en-US" sz="1050" dirty="0">
+                <a:solidFill>
+                  <a:srgbClr val="CCCCCC"/>
+                </a:solidFill>
+                <a:latin typeface="Courier New" pitchFamily="34" charset="0"/>
+                <a:ea typeface="Courier New" pitchFamily="34" charset="-122"/>
+                <a:cs typeface="Courier New" pitchFamily="34" charset="-120"/>
+              </a:rPr>
+              <a:t>=</a:t>
+            </a:r>
+            <a:r>
+              <a:rPr lang="en-US" sz="1050" dirty="0">
+                <a:solidFill>
+                  <a:srgbClr val="CCCCCC"/>
+                </a:solidFill>
+                <a:latin typeface="Courier New" pitchFamily="34" charset="0"/>
+                <a:ea typeface="Courier New" pitchFamily="34" charset="-122"/>
+                <a:cs typeface="Courier New" pitchFamily="34" charset="-120"/>
+              </a:rPr>
+              <a:t> </a:t>
+            </a:r>
+            <a:r>
+              <a:rPr lang="en-US" sz="1050" dirty="0">
+                <a:solidFill>
+                  <a:srgbClr val="CE9178"/>
+                </a:solidFill>
+                <a:latin typeface="Courier New" pitchFamily="34" charset="0"/>
+                <a:ea typeface="Courier New" pitchFamily="34" charset="-122"/>
+                <a:cs typeface="Courier New" pitchFamily="34" charset="-120"/>
+              </a:rPr>
+              <a:t>'Z_VIACEP'</a:t>
+            </a:r>
+            <a:r>
+              <a:rPr lang="en-US" sz="1050" dirty="0">
+                <a:solidFill>
+                  <a:srgbClr val="CCCCCC"/>
+                </a:solidFill>
+                <a:latin typeface="Courier New" pitchFamily="34" charset="0"/>
+                <a:ea typeface="Courier New" pitchFamily="34" charset="-122"/>
+                <a:cs typeface="Courier New" pitchFamily="34" charset="-120"/>
+              </a:rPr>
+              <a:t>   </a:t>
+            </a:r>
+            <a:r>
+              <a:rPr lang="en-US" sz="1050" i="1" dirty="0">
+                <a:solidFill>
+                  <a:srgbClr val="6A9955"/>
+                </a:solidFill>
+                <a:latin typeface="Courier New" pitchFamily="34" charset="0"/>
+                <a:ea typeface="Courier New" pitchFamily="34" charset="-122"/>
+                <a:cs typeface="Courier New" pitchFamily="34" charset="-120"/>
+              </a:rPr>
+              <a:t>" SM59, tipo G</a:t>
+            </a:r>
+            <a:endParaRPr lang="en-US" sz="1050" dirty="0"/>
+          </a:p>
+          <a:p>
+            <a:pPr indent="0" marL="0">
+              <a:lnSpc>
+                <a:spcPct val="105000"/>
+              </a:lnSpc>
+              <a:buNone/>
+            </a:pPr>
+            <a:r>
+              <a:rPr lang="en-US" sz="1050" dirty="0">
+                <a:solidFill>
+                  <a:srgbClr val="CCCCCC"/>
+                </a:solidFill>
+                <a:latin typeface="Courier New" pitchFamily="34" charset="0"/>
+                <a:ea typeface="Courier New" pitchFamily="34" charset="-122"/>
+                <a:cs typeface="Courier New" pitchFamily="34" charset="-120"/>
+              </a:rPr>
+              <a:t>  </a:t>
+            </a:r>
+            <a:r>
+              <a:rPr lang="en-US" sz="1050" dirty="0">
+                <a:solidFill>
+                  <a:srgbClr val="569CD6"/>
+                </a:solidFill>
+                <a:latin typeface="Courier New" pitchFamily="34" charset="0"/>
+                <a:ea typeface="Courier New" pitchFamily="34" charset="-122"/>
+                <a:cs typeface="Courier New" pitchFamily="34" charset="-120"/>
+              </a:rPr>
+              <a:t>IMPORTING</a:t>
+            </a:r>
+            <a:r>
+              <a:rPr lang="en-US" sz="1050" dirty="0">
+                <a:solidFill>
+                  <a:srgbClr val="CCCCCC"/>
+                </a:solidFill>
+                <a:latin typeface="Courier New" pitchFamily="34" charset="0"/>
+                <a:ea typeface="Courier New" pitchFamily="34" charset="-122"/>
+                <a:cs typeface="Courier New" pitchFamily="34" charset="-120"/>
+              </a:rPr>
+              <a:t>  </a:t>
+            </a:r>
+            <a:r>
+              <a:rPr lang="en-US" sz="1050" dirty="0">
+                <a:solidFill>
+                  <a:srgbClr val="CCCCCC"/>
+                </a:solidFill>
+                <a:latin typeface="Courier New" pitchFamily="34" charset="0"/>
+                <a:ea typeface="Courier New" pitchFamily="34" charset="-122"/>
+                <a:cs typeface="Courier New" pitchFamily="34" charset="-120"/>
+              </a:rPr>
+              <a:t>client</a:t>
+            </a:r>
+            <a:r>
+              <a:rPr lang="en-US" sz="1050" dirty="0">
+                <a:solidFill>
+                  <a:srgbClr val="CCCCCC"/>
+                </a:solidFill>
+                <a:latin typeface="Courier New" pitchFamily="34" charset="0"/>
+                <a:ea typeface="Courier New" pitchFamily="34" charset="-122"/>
+                <a:cs typeface="Courier New" pitchFamily="34" charset="-120"/>
+              </a:rPr>
+              <a:t>      </a:t>
+            </a:r>
+            <a:r>
+              <a:rPr lang="en-US" sz="1050" dirty="0">
+                <a:solidFill>
+                  <a:srgbClr val="CCCCCC"/>
+                </a:solidFill>
+                <a:latin typeface="Courier New" pitchFamily="34" charset="0"/>
+                <a:ea typeface="Courier New" pitchFamily="34" charset="-122"/>
+                <a:cs typeface="Courier New" pitchFamily="34" charset="-120"/>
+              </a:rPr>
+              <a:t>=</a:t>
+            </a:r>
+            <a:r>
+              <a:rPr lang="en-US" sz="1050" dirty="0">
+                <a:solidFill>
+                  <a:srgbClr val="CCCCCC"/>
+                </a:solidFill>
+                <a:latin typeface="Courier New" pitchFamily="34" charset="0"/>
+                <a:ea typeface="Courier New" pitchFamily="34" charset="-122"/>
+                <a:cs typeface="Courier New" pitchFamily="34" charset="-120"/>
+              </a:rPr>
+              <a:t> </a:t>
+            </a:r>
+            <a:r>
+              <a:rPr lang="en-US" sz="1050" dirty="0">
+                <a:solidFill>
+                  <a:srgbClr val="CCCCCC"/>
+                </a:solidFill>
+                <a:latin typeface="Courier New" pitchFamily="34" charset="0"/>
+                <a:ea typeface="Courier New" pitchFamily="34" charset="-122"/>
+                <a:cs typeface="Courier New" pitchFamily="34" charset="-120"/>
+              </a:rPr>
+              <a:t>lo_cliente</a:t>
+            </a:r>
+            <a:endParaRPr lang="en-US" sz="1050" dirty="0"/>
+          </a:p>
+          <a:p>
+            <a:pPr indent="0" marL="0">
+              <a:lnSpc>
+                <a:spcPct val="105000"/>
+              </a:lnSpc>
+              <a:buNone/>
+            </a:pPr>
+            <a:r>
+              <a:rPr lang="en-US" sz="1050" dirty="0">
+                <a:solidFill>
+                  <a:srgbClr val="CCCCCC"/>
+                </a:solidFill>
+                <a:latin typeface="Courier New" pitchFamily="34" charset="0"/>
+                <a:ea typeface="Courier New" pitchFamily="34" charset="-122"/>
+                <a:cs typeface="Courier New" pitchFamily="34" charset="-120"/>
+              </a:rPr>
+              <a:t>  </a:t>
+            </a:r>
+            <a:r>
+              <a:rPr lang="en-US" sz="1050" dirty="0">
+                <a:solidFill>
+                  <a:srgbClr val="CCCCCC"/>
+                </a:solidFill>
+                <a:latin typeface="Courier New" pitchFamily="34" charset="0"/>
+                <a:ea typeface="Courier New" pitchFamily="34" charset="-122"/>
+                <a:cs typeface="Courier New" pitchFamily="34" charset="-120"/>
+              </a:rPr>
+              <a:t>EXCEPTIONS</a:t>
+            </a:r>
+            <a:r>
+              <a:rPr lang="en-US" sz="1050" dirty="0">
+                <a:solidFill>
+                  <a:srgbClr val="CCCCCC"/>
+                </a:solidFill>
+                <a:latin typeface="Courier New" pitchFamily="34" charset="0"/>
+                <a:ea typeface="Courier New" pitchFamily="34" charset="-122"/>
+                <a:cs typeface="Courier New" pitchFamily="34" charset="-120"/>
+              </a:rPr>
+              <a:t> </a:t>
+            </a:r>
+            <a:r>
+              <a:rPr lang="en-US" sz="1050" dirty="0">
+                <a:solidFill>
+                  <a:srgbClr val="CCCCCC"/>
+                </a:solidFill>
+                <a:latin typeface="Courier New" pitchFamily="34" charset="0"/>
+                <a:ea typeface="Courier New" pitchFamily="34" charset="-122"/>
+                <a:cs typeface="Courier New" pitchFamily="34" charset="-120"/>
+              </a:rPr>
+              <a:t>destination_not_found</a:t>
+            </a:r>
+            <a:r>
+              <a:rPr lang="en-US" sz="1050" dirty="0">
+                <a:solidFill>
+                  <a:srgbClr val="CCCCCC"/>
+                </a:solidFill>
+                <a:latin typeface="Courier New" pitchFamily="34" charset="0"/>
+                <a:ea typeface="Courier New" pitchFamily="34" charset="-122"/>
+                <a:cs typeface="Courier New" pitchFamily="34" charset="-120"/>
+              </a:rPr>
+              <a:t> </a:t>
+            </a:r>
+            <a:r>
+              <a:rPr lang="en-US" sz="1050" dirty="0">
+                <a:solidFill>
+                  <a:srgbClr val="CCCCCC"/>
+                </a:solidFill>
+                <a:latin typeface="Courier New" pitchFamily="34" charset="0"/>
+                <a:ea typeface="Courier New" pitchFamily="34" charset="-122"/>
+                <a:cs typeface="Courier New" pitchFamily="34" charset="-120"/>
+              </a:rPr>
+              <a:t>=</a:t>
+            </a:r>
+            <a:r>
+              <a:rPr lang="en-US" sz="1050" dirty="0">
+                <a:solidFill>
+                  <a:srgbClr val="CCCCCC"/>
+                </a:solidFill>
+                <a:latin typeface="Courier New" pitchFamily="34" charset="0"/>
+                <a:ea typeface="Courier New" pitchFamily="34" charset="-122"/>
+                <a:cs typeface="Courier New" pitchFamily="34" charset="-120"/>
+              </a:rPr>
+              <a:t> </a:t>
+            </a:r>
+            <a:r>
+              <a:rPr lang="en-US" sz="1050" dirty="0">
+                <a:solidFill>
+                  <a:srgbClr val="B5CEA8"/>
+                </a:solidFill>
+                <a:latin typeface="Courier New" pitchFamily="34" charset="0"/>
+                <a:ea typeface="Courier New" pitchFamily="34" charset="-122"/>
+                <a:cs typeface="Courier New" pitchFamily="34" charset="-120"/>
+              </a:rPr>
+              <a:t>2</a:t>
+            </a:r>
+            <a:endParaRPr lang="en-US" sz="1050" dirty="0"/>
+          </a:p>
+          <a:p>
+            <a:pPr indent="0" marL="0">
+              <a:lnSpc>
+                <a:spcPct val="105000"/>
+              </a:lnSpc>
+              <a:buNone/>
+            </a:pPr>
+            <a:r>
+              <a:rPr lang="en-US" sz="1050" dirty="0">
+                <a:solidFill>
+                  <a:srgbClr val="CCCCCC"/>
+                </a:solidFill>
+                <a:latin typeface="Courier New" pitchFamily="34" charset="0"/>
+                <a:ea typeface="Courier New" pitchFamily="34" charset="-122"/>
+                <a:cs typeface="Courier New" pitchFamily="34" charset="-120"/>
+              </a:rPr>
+              <a:t>             </a:t>
+            </a:r>
+            <a:r>
+              <a:rPr lang="en-US" sz="1050" dirty="0">
+                <a:solidFill>
+                  <a:srgbClr val="569CD6"/>
+                </a:solidFill>
+                <a:latin typeface="Courier New" pitchFamily="34" charset="0"/>
+                <a:ea typeface="Courier New" pitchFamily="34" charset="-122"/>
+                <a:cs typeface="Courier New" pitchFamily="34" charset="-120"/>
+              </a:rPr>
+              <a:t>OTHERS</a:t>
+            </a:r>
+            <a:r>
+              <a:rPr lang="en-US" sz="1050" dirty="0">
+                <a:solidFill>
+                  <a:srgbClr val="CCCCCC"/>
+                </a:solidFill>
+                <a:latin typeface="Courier New" pitchFamily="34" charset="0"/>
+                <a:ea typeface="Courier New" pitchFamily="34" charset="-122"/>
+                <a:cs typeface="Courier New" pitchFamily="34" charset="-120"/>
+              </a:rPr>
+              <a:t>                </a:t>
+            </a:r>
+            <a:r>
+              <a:rPr lang="en-US" sz="1050" dirty="0">
+                <a:solidFill>
+                  <a:srgbClr val="CCCCCC"/>
+                </a:solidFill>
+                <a:latin typeface="Courier New" pitchFamily="34" charset="0"/>
+                <a:ea typeface="Courier New" pitchFamily="34" charset="-122"/>
+                <a:cs typeface="Courier New" pitchFamily="34" charset="-120"/>
+              </a:rPr>
+              <a:t>=</a:t>
+            </a:r>
+            <a:r>
+              <a:rPr lang="en-US" sz="1050" dirty="0">
+                <a:solidFill>
+                  <a:srgbClr val="CCCCCC"/>
+                </a:solidFill>
+                <a:latin typeface="Courier New" pitchFamily="34" charset="0"/>
+                <a:ea typeface="Courier New" pitchFamily="34" charset="-122"/>
+                <a:cs typeface="Courier New" pitchFamily="34" charset="-120"/>
+              </a:rPr>
+              <a:t> </a:t>
+            </a:r>
+            <a:r>
+              <a:rPr lang="en-US" sz="1050" dirty="0">
+                <a:solidFill>
+                  <a:srgbClr val="B5CEA8"/>
+                </a:solidFill>
+                <a:latin typeface="Courier New" pitchFamily="34" charset="0"/>
+                <a:ea typeface="Courier New" pitchFamily="34" charset="-122"/>
+                <a:cs typeface="Courier New" pitchFamily="34" charset="-120"/>
+              </a:rPr>
+              <a:t>6</a:t>
+            </a:r>
+            <a:r>
+              <a:rPr lang="en-US" sz="1050" dirty="0">
+                <a:solidFill>
+                  <a:srgbClr val="CCCCCC"/>
+                </a:solidFill>
+                <a:latin typeface="Courier New" pitchFamily="34" charset="0"/>
+                <a:ea typeface="Courier New" pitchFamily="34" charset="-122"/>
+                <a:cs typeface="Courier New" pitchFamily="34" charset="-120"/>
+              </a:rPr>
+              <a:t> </a:t>
+            </a:r>
+            <a:r>
+              <a:rPr lang="en-US" sz="1050" dirty="0">
+                <a:solidFill>
+                  <a:srgbClr val="CCCCCC"/>
+                </a:solidFill>
+                <a:latin typeface="Courier New" pitchFamily="34" charset="0"/>
+                <a:ea typeface="Courier New" pitchFamily="34" charset="-122"/>
+                <a:cs typeface="Courier New" pitchFamily="34" charset="-120"/>
+              </a:rPr>
+              <a:t>)</a:t>
+            </a:r>
+            <a:r>
+              <a:rPr lang="en-US" sz="1050" dirty="0">
+                <a:solidFill>
+                  <a:srgbClr val="CCCCCC"/>
+                </a:solidFill>
+                <a:latin typeface="Courier New" pitchFamily="34" charset="0"/>
+                <a:ea typeface="Courier New" pitchFamily="34" charset="-122"/>
+                <a:cs typeface="Courier New" pitchFamily="34" charset="-120"/>
+              </a:rPr>
+              <a:t>.</a:t>
+            </a:r>
+            <a:endParaRPr lang="en-US" sz="1050" dirty="0"/>
+          </a:p>
+        </p:txBody>
+      </p:sp>
+      <p:sp>
+        <p:nvSpPr>
+          <p:cNvPr id="23" name="Text 21"/>
           <p:cNvSpPr txBox="1"/>
           <p:nvPr/>
         </p:nvSpPr>
         <p:spPr>
           <a:xfrm>
-            <a:off x="9984219" y="2308860"/>
-            <a:ext cx="694944" cy="694944"/>
-          </a:xfrm>
-          <a:prstGeom prst="rect">
-            <a:avLst/>
-          </a:prstGeom>
-          <a:noFill/>
-          <a:ln/>
-        </p:spPr>
-        <p:txBody>
-          <a:bodyPr wrap="square" lIns="0" tIns="0" rIns="0" bIns="0" rtlCol="0" anchor="ctr"/>
-          <a:lstStyle/>
-          <a:p>
-            <a:pPr algn="ctr" indent="0" marL="0">
-              <a:buNone/>
-            </a:pPr>
-            <a:r>
-              <a:rPr lang="en-US" sz="2280" b="1" dirty="0">
-                <a:solidFill>
-                  <a:srgbClr val="FFFFFF"/>
-                </a:solidFill>
-              </a:rPr>
-              <a:t>4</a:t>
-            </a:r>
-            <a:endParaRPr lang="en-US" sz="2280" dirty="0"/>
-          </a:p>
-        </p:txBody>
-      </p:sp>
-      <p:sp>
-        <p:nvSpPr>
-          <p:cNvPr id="19" name="Shape 17"/>
-          <p:cNvSpPr/>
-          <p:nvPr/>
-        </p:nvSpPr>
-        <p:spPr>
-          <a:xfrm>
-            <a:off x="9020327" y="3177540"/>
-            <a:ext cx="2622728" cy="1581912"/>
-          </a:xfrm>
-          <a:prstGeom prst="roundRect">
-            <a:avLst>
-              <a:gd name="adj" fmla="val 5780"/>
-            </a:avLst>
-          </a:prstGeom>
-          <a:solidFill>
-            <a:srgbClr val="FFFFFF"/>
-          </a:solidFill>
-          <a:ln w="9525">
-            <a:solidFill>
-              <a:srgbClr val="E5E5E5"/>
-            </a:solidFill>
-            <a:prstDash val="solid"/>
-          </a:ln>
-          <a:effectLst>
-            <a:outerShdw sx="100000" sy="100000" kx="0" ky="0" algn="bl" rotWithShape="0" blurRad="63500" dist="12700" dir="5400000">
-              <a:srgbClr val="1D2D3E">
-                <a:alpha val="8000"/>
-              </a:srgbClr>
-            </a:outerShdw>
-          </a:effectLst>
-        </p:spPr>
-      </p:sp>
-      <p:sp>
-        <p:nvSpPr>
-          <p:cNvPr id="20" name="Text 18"/>
-          <p:cNvSpPr txBox="1"/>
-          <p:nvPr/>
-        </p:nvSpPr>
-        <p:spPr>
-          <a:xfrm>
-            <a:off x="9203207" y="3360420"/>
-            <a:ext cx="1845488" cy="1261872"/>
+            <a:off x="6233008" y="4151376"/>
+            <a:ext cx="5410048" cy="2020824"/>
           </a:xfrm>
           <a:prstGeom prst="rect">
             <a:avLst/>
@@ -8619,239 +9916,66 @@
           <a:lstStyle/>
           <a:p>
             <a:pPr indent="0" marL="0">
-              <a:spcAft>
-                <a:spcPts val="600"/>
-              </a:spcAft>
-              <a:buNone/>
-            </a:pPr>
-            <a:r>
-              <a:rPr lang="en-US" sz="1350" b="1" dirty="0">
-                <a:solidFill>
-                  <a:srgbClr val="1D2D3E"/>
-                </a:solidFill>
-              </a:rPr>
-              <a:t>Optimize</a:t>
+              <a:buNone/>
+            </a:pPr>
+            <a:r>
+              <a:rPr lang="en-US" sz="1200" dirty="0">
+                <a:solidFill>
+                  <a:srgbClr val="0064D9"/>
+                </a:solidFill>
+                <a:latin typeface="Courier New" pitchFamily="34" charset="0"/>
+                <a:ea typeface="Courier New" pitchFamily="34" charset="-122"/>
+                <a:cs typeface="Courier New" pitchFamily="34" charset="-120"/>
+              </a:rPr>
+              <a:t>CL_HTTP_CLIENT</a:t>
+            </a:r>
+            <a:r>
+              <a:rPr lang="en-US" sz="1200" dirty="0">
+                <a:solidFill>
+                  <a:srgbClr val="556B82"/>
+                </a:solidFill>
+              </a:rPr>
+              <a:t> é API clássica. Em pacotes ABAP for Cloud Development, isole a classe num subpacote Standard ABAP e libere-a com </a:t>
+            </a:r>
+            <a:r>
+              <a:rPr lang="en-US" sz="1200" b="1" dirty="0">
+                <a:solidFill>
+                  <a:srgbClr val="556B82"/>
+                </a:solidFill>
+              </a:rPr>
+              <a:t>C1</a:t>
+            </a:r>
+            <a:r>
+              <a:rPr lang="en-US" sz="1200" dirty="0">
+                <a:solidFill>
+                  <a:srgbClr val="556B82"/>
+                </a:solidFill>
+              </a:rPr>
+              <a:t>: um wrapper. As duas versões implementam </a:t>
+            </a:r>
+            <a:r>
+              <a:rPr lang="en-US" sz="1200" dirty="0">
+                <a:solidFill>
+                  <a:srgbClr val="0064D9"/>
+                </a:solidFill>
+                <a:latin typeface="Courier New" pitchFamily="34" charset="0"/>
+                <a:ea typeface="Courier New" pitchFamily="34" charset="-122"/>
+                <a:cs typeface="Courier New" pitchFamily="34" charset="-120"/>
+              </a:rPr>
+              <a:t>ZIF_PC_VIACEP</a:t>
+            </a:r>
+            <a:r>
+              <a:rPr lang="en-US" sz="1200" dirty="0">
+                <a:solidFill>
+                  <a:srgbClr val="556B82"/>
+                </a:solidFill>
+              </a:rPr>
+              <a:t>.</a:t>
             </a:r>
             <a:endParaRPr lang="en-US" sz="1400" dirty="0"/>
           </a:p>
-          <a:p>
-            <a:pPr indent="0" marL="0">
-              <a:buNone/>
-            </a:pPr>
-            <a:r>
-              <a:rPr lang="en-US" sz="1150" dirty="0">
-                <a:solidFill>
-                  <a:srgbClr val="556B82"/>
-                </a:solidFill>
-              </a:rPr>
-              <a:t>SQL Monitor, SQL Trace e Performance Monitor no código mantido.</a:t>
-            </a:r>
-            <a:endParaRPr lang="en-US" sz="1400" dirty="0"/>
-          </a:p>
-        </p:txBody>
-      </p:sp>
-      <p:sp>
-        <p:nvSpPr>
-          <p:cNvPr id="21" name="Shape 19"/>
-          <p:cNvSpPr/>
-          <p:nvPr/>
-        </p:nvSpPr>
-        <p:spPr>
-          <a:xfrm>
-            <a:off x="548640" y="4942332"/>
-            <a:ext cx="11094415" cy="566928"/>
-          </a:xfrm>
-          <a:prstGeom prst="roundRect">
-            <a:avLst>
-              <a:gd name="adj" fmla="val 12903"/>
-            </a:avLst>
-          </a:prstGeom>
-          <a:solidFill>
-            <a:srgbClr val="E1F4FF"/>
-          </a:solidFill>
-          <a:ln/>
-        </p:spPr>
-      </p:sp>
-      <p:sp>
-        <p:nvSpPr>
-          <p:cNvPr id="22" name="Text 20"/>
-          <p:cNvSpPr txBox="1"/>
-          <p:nvPr/>
-        </p:nvSpPr>
-        <p:spPr>
-          <a:xfrm>
-            <a:off x="1207008" y="4942332"/>
-            <a:ext cx="10225735" cy="566928"/>
-          </a:xfrm>
-          <a:prstGeom prst="rect">
-            <a:avLst/>
-          </a:prstGeom>
-          <a:noFill/>
-          <a:ln/>
-        </p:spPr>
-        <p:txBody>
-          <a:bodyPr wrap="square" lIns="0" tIns="0" rIns="0" bIns="0" rtlCol="0" anchor="ctr"/>
-          <a:lstStyle/>
-          <a:p>
-            <a:pPr indent="0" marL="0">
-              <a:buNone/>
-            </a:pPr>
-            <a:r>
-              <a:rPr lang="en-US" sz="1200" b="1" dirty="0">
-                <a:solidFill>
-                  <a:srgbClr val="0064D9"/>
-                </a:solidFill>
-              </a:rPr>
-              <a:t>Greenfield  </a:t>
-            </a:r>
-            <a:r>
-              <a:rPr lang="en-US" sz="1200" dirty="0">
-                <a:solidFill>
-                  <a:srgbClr val="1D2D3E"/>
-                </a:solidFill>
-              </a:rPr>
-              <a:t>uma nova implementação já nasce limpa; o trabalho é </a:t>
-            </a:r>
-            <a:r>
-              <a:rPr lang="en-US" sz="1200" b="1" dirty="0">
-                <a:solidFill>
-                  <a:srgbClr val="1D2D3E"/>
-                </a:solidFill>
-              </a:rPr>
-              <a:t>manter</a:t>
-            </a:r>
-            <a:r>
-              <a:rPr lang="en-US" sz="1200" dirty="0">
-                <a:solidFill>
-                  <a:srgbClr val="1D2D3E"/>
-                </a:solidFill>
-              </a:rPr>
-              <a:t> o núcleo limpo.</a:t>
-            </a:r>
-            <a:endParaRPr lang="en-US" sz="1400" dirty="0"/>
-          </a:p>
-        </p:txBody>
-      </p:sp>
-      <p:pic>
-        <p:nvPicPr>
-          <p:cNvPr id="23" name="Image 0" descr="preencoded.png">    </p:cNvPr>
-          <p:cNvPicPr>
-            <a:picLocks noChangeAspect="1"/>
-          </p:cNvPicPr>
-          <p:nvPr/>
-        </p:nvPicPr>
-        <p:blipFill>
-          <a:blip r:embed="rId1"/>
-          <a:stretch>
-            <a:fillRect/>
-          </a:stretch>
-        </p:blipFill>
-        <p:spPr>
-          <a:xfrm>
-            <a:off x="2622728" y="3332988"/>
-            <a:ext cx="329184" cy="329184"/>
-          </a:xfrm>
-          <a:prstGeom prst="rect">
-            <a:avLst/>
-          </a:prstGeom>
-        </p:spPr>
-      </p:pic>
-      <p:pic>
-        <p:nvPicPr>
-          <p:cNvPr id="24" name="Image 1" descr="preencoded.png">    </p:cNvPr>
-          <p:cNvPicPr>
-            <a:picLocks noChangeAspect="1"/>
-          </p:cNvPicPr>
-          <p:nvPr/>
-        </p:nvPicPr>
-        <p:blipFill>
-          <a:blip r:embed="rId2"/>
-          <a:stretch>
-            <a:fillRect/>
-          </a:stretch>
-        </p:blipFill>
-        <p:spPr>
-          <a:xfrm>
-            <a:off x="5446624" y="3332988"/>
-            <a:ext cx="329184" cy="329184"/>
-          </a:xfrm>
-          <a:prstGeom prst="rect">
-            <a:avLst/>
-          </a:prstGeom>
-        </p:spPr>
-      </p:pic>
-      <p:pic>
-        <p:nvPicPr>
-          <p:cNvPr id="25" name="Image 2" descr="preencoded.png">    </p:cNvPr>
-          <p:cNvPicPr>
-            <a:picLocks noChangeAspect="1"/>
-          </p:cNvPicPr>
-          <p:nvPr/>
-        </p:nvPicPr>
-        <p:blipFill>
-          <a:blip r:embed="rId3"/>
-          <a:stretch>
-            <a:fillRect/>
-          </a:stretch>
-        </p:blipFill>
-        <p:spPr>
-          <a:xfrm>
-            <a:off x="8270519" y="3332988"/>
-            <a:ext cx="329184" cy="329184"/>
-          </a:xfrm>
-          <a:prstGeom prst="rect">
-            <a:avLst/>
-          </a:prstGeom>
-        </p:spPr>
-      </p:pic>
-      <p:pic>
-        <p:nvPicPr>
-          <p:cNvPr id="26" name="Image 3" descr="preencoded.png">    </p:cNvPr>
-          <p:cNvPicPr>
-            <a:picLocks noChangeAspect="1"/>
-          </p:cNvPicPr>
-          <p:nvPr/>
-        </p:nvPicPr>
-        <p:blipFill>
-          <a:blip r:embed="rId4"/>
-          <a:stretch>
-            <a:fillRect/>
-          </a:stretch>
-        </p:blipFill>
-        <p:spPr>
-          <a:xfrm>
-            <a:off x="749808" y="5070348"/>
-            <a:ext cx="310896" cy="310896"/>
-          </a:xfrm>
-          <a:prstGeom prst="rect">
-            <a:avLst/>
-          </a:prstGeom>
-        </p:spPr>
-      </p:pic>
-      <p:pic>
-        <p:nvPicPr>
-          <p:cNvPr id="27" name="Image 4" descr="preencoded.png">    </p:cNvPr>
-          <p:cNvPicPr>
-            <a:picLocks noChangeAspect="1"/>
-          </p:cNvPicPr>
-          <p:nvPr/>
-        </p:nvPicPr>
-        <p:blipFill>
-          <a:blip r:embed="rId5"/>
-          <a:stretch>
-            <a:fillRect/>
-          </a:stretch>
-        </p:blipFill>
-        <p:spPr>
-          <a:xfrm>
-            <a:off x="11094415" y="3332988"/>
-            <a:ext cx="329184" cy="329184"/>
-          </a:xfrm>
-          <a:prstGeom prst="rect">
-            <a:avLst/>
-          </a:prstGeom>
-        </p:spPr>
-      </p:pic>
+        </p:txBody>
+      </p:sp>
       <p:sp>
         <p:nvSpPr>
           <p:cNvPr id="25" name="Slide Number Placeholder 0"/>
@@ -8925,49 +10049,15 @@
       <p:sp>
         <p:nvSpPr>
           <p:cNvPr id="2" name="Text 0"/>
-          <p:cNvSpPr txBox="1"/>
-          <p:nvPr/>
-        </p:nvSpPr>
-        <p:spPr>
-          <a:xfrm>
-            <a:off x="731520" y="502920"/>
-            <a:ext cx="7315200" cy="320040"/>
-          </a:xfrm>
-          <a:prstGeom prst="rect">
-            <a:avLst/>
-          </a:prstGeom>
-          <a:noFill/>
-          <a:ln/>
-        </p:spPr>
-        <p:txBody>
-          <a:bodyPr wrap="square" lIns="0" tIns="0" rIns="0" bIns="0" rtlCol="0" anchor="t"/>
-          <a:lstStyle/>
-          <a:p>
-            <a:pPr indent="0" marL="0">
-              <a:buNone/>
-            </a:pPr>
-            <a:r>
-              <a:rPr lang="en-US" sz="1300" b="1" spc="200" kern="0" dirty="0">
-                <a:solidFill>
-                  <a:srgbClr val="89D1FF"/>
-                </a:solidFill>
-              </a:rPr>
-              <a:t>RESUMO DA AULA</a:t>
-            </a:r>
-            <a:endParaRPr lang="en-US" sz="1300" dirty="0"/>
-          </a:p>
-        </p:txBody>
-      </p:sp>
-      <p:sp>
-        <p:nvSpPr>
-          <p:cNvPr id="3" name="Text 1"/>
-          <p:cNvSpPr txBox="1"/>
-          <p:nvPr/>
-        </p:nvSpPr>
-        <p:spPr>
-          <a:xfrm>
-            <a:off x="731520" y="868680"/>
-            <a:ext cx="10698480" cy="731520"/>
+          <p:cNvSpPr/>
+          <p:nvPr>
+            <p:ph idx="100" type="body" hasCustomPrompt="1"/>
+          </p:nvPr>
+        </p:nvSpPr>
+        <p:spPr>
+          <a:xfrm>
+            <a:off x="548640" y="411480"/>
+            <a:ext cx="11094415" cy="274320"/>
           </a:xfrm>
           <a:prstGeom prst="rect">
             <a:avLst/>
@@ -8979,18 +10069,56 @@
           <a:bodyPr wrap="square" lIns="0" tIns="0" rIns="0" bIns="0" rtlCol="0" anchor="ctr"/>
           <a:lstStyle/>
           <a:p>
-            <a:pPr indent="0" marL="0">
-              <a:buNone/>
-            </a:pPr>
-            <a:r>
-              <a:rPr lang="en-US" sz="3200" b="1" dirty="0">
-                <a:solidFill>
-                  <a:srgbClr val="FFFFFF"/>
-                </a:solidFill>
-              </a:rPr>
-              <a:t>O que aprendemos na aula 05.05</a:t>
-            </a:r>
-            <a:endParaRPr lang="en-US" sz="3200" dirty="0"/>
+            <a:pPr algn="l" indent="0" marL="0">
+              <a:buNone/>
+            </a:pPr>
+            <a:r>
+              <a:rPr lang="en-US" sz="1100" b="1" spc="150" kern="0" dirty="0">
+                <a:solidFill>
+                  <a:srgbClr val="0064D9"/>
+                </a:solidFill>
+              </a:rPr>
+              <a:t>WRAPPERS · BROWNFIELD</a:t>
+            </a:r>
+            <a:endParaRPr lang="en-US" sz="1100" dirty="0"/>
+          </a:p>
+        </p:txBody>
+      </p:sp>
+      <p:sp>
+        <p:nvSpPr>
+          <p:cNvPr id="3" name="Text 0"/>
+          <p:cNvSpPr/>
+          <p:nvPr>
+            <p:ph idx="101" type="title" hasCustomPrompt="1"/>
+          </p:nvPr>
+        </p:nvSpPr>
+        <p:spPr>
+          <a:xfrm>
+            <a:off x="548640" y="731520"/>
+            <a:ext cx="11094415" cy="640080"/>
+          </a:xfrm>
+          <a:prstGeom prst="rect">
+            <a:avLst/>
+          </a:prstGeom>
+          <a:noFill/>
+          <a:ln/>
+        </p:spPr>
+        <p:txBody>
+          <a:bodyPr wrap="square" lIns="0" tIns="0" rIns="0" bIns="0" rtlCol="0" anchor="ctr"/>
+          <a:lstStyle/>
+          <a:p>
+            <a:pPr algn="l" indent="0" marL="0">
+              <a:buNone/>
+            </a:pPr>
+            <a:r>
+              <a:rPr lang="en-US" sz="2800" b="1" dirty="0">
+                <a:solidFill>
+                  <a:srgbClr val="1D2D3E"/>
+                </a:solidFill>
+              </a:rPr>
+              <a:t>Quatro workstreams depois da conversão</a:t>
+            </a:r>
+            <a:endParaRPr lang="en-US" sz="2800" dirty="0"/>
           </a:p>
         </p:txBody>
       </p:sp>
@@ -9002,13 +10130,34 @@
         </p:nvSpPr>
         <p:spPr>
           <a:xfrm>
-            <a:off x="731520" y="1874520"/>
-            <a:ext cx="438912" cy="438912"/>
-          </a:xfrm>
-          <a:prstGeom prst="roundRect">
-            <a:avLst>
-              <a:gd name="adj" fmla="val 20833"/>
-            </a:avLst>
+            <a:off x="1860004" y="2656332"/>
+            <a:ext cx="8471687" cy="0"/>
+          </a:xfrm>
+          <a:prstGeom prst="line">
+            <a:avLst/>
+          </a:prstGeom>
+          <a:noFill/>
+          <a:ln w="25400">
+            <a:solidFill>
+              <a:srgbClr val="0070F2"/>
+            </a:solidFill>
+            <a:prstDash val="dash"/>
+          </a:ln>
+        </p:spPr>
+      </p:sp>
+      <p:sp>
+        <p:nvSpPr>
+          <p:cNvPr id="5" name="Shape 3"/>
+          <p:cNvSpPr/>
+          <p:nvPr/>
+        </p:nvSpPr>
+        <p:spPr>
+          <a:xfrm>
+            <a:off x="1512532" y="2308860"/>
+            <a:ext cx="694944" cy="694944"/>
+          </a:xfrm>
+          <a:prstGeom prst="ellipse">
+            <a:avLst/>
           </a:prstGeom>
           <a:solidFill>
             <a:srgbClr val="0070F2"/>
@@ -9018,14 +10167,84 @@
       </p:sp>
       <p:sp>
         <p:nvSpPr>
-          <p:cNvPr id="5" name="Text 3"/>
+          <p:cNvPr id="6" name="Text 4"/>
           <p:cNvSpPr txBox="1"/>
           <p:nvPr/>
         </p:nvSpPr>
         <p:spPr>
           <a:xfrm>
-            <a:off x="1353312" y="1819656"/>
-            <a:ext cx="4663440" cy="868680"/>
+            <a:off x="1512532" y="2308860"/>
+            <a:ext cx="694944" cy="694944"/>
+          </a:xfrm>
+          <a:prstGeom prst="rect">
+            <a:avLst/>
+          </a:prstGeom>
+          <a:noFill/>
+          <a:ln/>
+        </p:spPr>
+        <p:txBody>
+          <a:bodyPr wrap="square" lIns="0" tIns="0" rIns="0" bIns="0" rtlCol="0" anchor="ctr"/>
+          <a:lstStyle/>
+          <a:p>
+            <a:pPr algn="ctr" indent="0" marL="0">
+              <a:buNone/>
+            </a:pPr>
+            <a:r>
+              <a:rPr lang="en-US" sz="2280" b="1" dirty="0">
+                <a:solidFill>
+                  <a:srgbClr val="FFFFFF"/>
+                </a:solidFill>
+              </a:rPr>
+              <a:t>1</a:t>
+            </a:r>
+            <a:endParaRPr lang="en-US" sz="2280" dirty="0"/>
+          </a:p>
+        </p:txBody>
+      </p:sp>
+      <p:sp>
+        <p:nvSpPr>
+          <p:cNvPr id="7" name="Shape 5"/>
+          <p:cNvSpPr/>
+          <p:nvPr/>
+        </p:nvSpPr>
+        <p:spPr>
+          <a:xfrm>
+            <a:off x="548640" y="3177540"/>
+            <a:ext cx="2622728" cy="1581912"/>
+          </a:xfrm>
+          <a:prstGeom prst="roundRect">
+            <a:avLst>
+              <a:gd name="adj" fmla="val 5780"/>
+            </a:avLst>
+          </a:prstGeom>
+          <a:solidFill>
+            <a:srgbClr val="FFFFFF"/>
+          </a:solidFill>
+          <a:ln w="9525">
+            <a:solidFill>
+              <a:srgbClr val="E5E5E5"/>
+            </a:solidFill>
+            <a:prstDash val="solid"/>
+          </a:ln>
+          <a:effectLst>
+            <a:outerShdw sx="100000" sy="100000" kx="0" ky="0" algn="bl" rotWithShape="0" blurRad="63500" dist="12700" dir="5400000">
+              <a:srgbClr val="1D2D3E">
+                <a:alpha val="8000"/>
+              </a:srgbClr>
+            </a:outerShdw>
+          </a:effectLst>
+        </p:spPr>
+      </p:sp>
+      <p:sp>
+        <p:nvSpPr>
+          <p:cNvPr id="8" name="Text 6"/>
+          <p:cNvSpPr txBox="1"/>
+          <p:nvPr/>
+        </p:nvSpPr>
+        <p:spPr>
+          <a:xfrm>
+            <a:off x="731520" y="3360420"/>
+            <a:ext cx="1845488" cy="1261872"/>
           </a:xfrm>
           <a:prstGeom prst="rect">
             <a:avLst/>
@@ -9038,51 +10257,85 @@
           <a:lstStyle/>
           <a:p>
             <a:pPr indent="0" marL="0">
-              <a:buNone/>
-            </a:pPr>
-            <a:r>
-              <a:rPr lang="en-US" sz="1400" dirty="0">
-                <a:solidFill>
-                  <a:srgbClr val="FFFFFF"/>
-                </a:solidFill>
-              </a:rPr>
-              <a:t>No Private Edition e on-premise, ABAP Cloud </a:t>
-            </a:r>
-            <a:r>
-              <a:rPr lang="en-US" sz="1400" b="1" dirty="0">
-                <a:solidFill>
-                  <a:srgbClr val="FFFFFF"/>
-                </a:solidFill>
-              </a:rPr>
-              <a:t>coexiste</a:t>
-            </a:r>
-            <a:r>
-              <a:rPr lang="en-US" sz="1400" dirty="0">
-                <a:solidFill>
-                  <a:srgbClr val="FFFFFF"/>
-                </a:solidFill>
-              </a:rPr>
-              <a:t> com o clássico, mas continua o preferido</a:t>
+              <a:spcAft>
+                <a:spcPts val="600"/>
+              </a:spcAft>
+              <a:buNone/>
+            </a:pPr>
+            <a:r>
+              <a:rPr lang="en-US" sz="1350" b="1" dirty="0">
+                <a:solidFill>
+                  <a:srgbClr val="1D2D3E"/>
+                </a:solidFill>
+              </a:rPr>
+              <a:t>Evaluate</a:t>
             </a:r>
             <a:endParaRPr lang="en-US" sz="1400" dirty="0"/>
           </a:p>
-        </p:txBody>
-      </p:sp>
-      <p:sp>
-        <p:nvSpPr>
-          <p:cNvPr id="6" name="Shape 4"/>
+          <a:p>
+            <a:pPr indent="0" marL="0">
+              <a:buNone/>
+            </a:pPr>
+            <a:r>
+              <a:rPr lang="en-US" sz="1150" dirty="0">
+                <a:solidFill>
+                  <a:srgbClr val="556B82"/>
+                </a:solidFill>
+              </a:rPr>
+              <a:t>ABAP call monitor (</a:t>
+            </a:r>
+            <a:r>
+              <a:rPr lang="en-US" sz="1150" dirty="0">
+                <a:solidFill>
+                  <a:srgbClr val="0064D9"/>
+                </a:solidFill>
+                <a:latin typeface="Courier New" pitchFamily="34" charset="0"/>
+                <a:ea typeface="Courier New" pitchFamily="34" charset="-122"/>
+                <a:cs typeface="Courier New" pitchFamily="34" charset="-120"/>
+              </a:rPr>
+              <a:t>SCMON</a:t>
+            </a:r>
+            <a:r>
+              <a:rPr lang="en-US" sz="1150" dirty="0">
+                <a:solidFill>
+                  <a:srgbClr val="556B82"/>
+                </a:solidFill>
+              </a:rPr>
+              <a:t>) e app </a:t>
+            </a:r>
+            <a:r>
+              <a:rPr lang="en-US" sz="1150" b="1" dirty="0">
+                <a:solidFill>
+                  <a:srgbClr val="556B82"/>
+                </a:solidFill>
+              </a:rPr>
+              <a:t>Custom Code Migration</a:t>
+            </a:r>
+            <a:r>
+              <a:rPr lang="en-US" sz="1150" dirty="0">
+                <a:solidFill>
+                  <a:srgbClr val="556B82"/>
+                </a:solidFill>
+              </a:rPr>
+              <a:t>.</a:t>
+            </a:r>
+            <a:endParaRPr lang="en-US" sz="1400" dirty="0"/>
+          </a:p>
+        </p:txBody>
+      </p:sp>
+      <p:sp>
+        <p:nvSpPr>
+          <p:cNvPr id="9" name="Shape 7"/>
           <p:cNvSpPr/>
           <p:nvPr/>
         </p:nvSpPr>
         <p:spPr>
           <a:xfrm>
-            <a:off x="6263640" y="1874520"/>
-            <a:ext cx="438912" cy="438912"/>
-          </a:xfrm>
-          <a:prstGeom prst="roundRect">
-            <a:avLst>
-              <a:gd name="adj" fmla="val 20833"/>
-            </a:avLst>
+            <a:off x="4336428" y="2308860"/>
+            <a:ext cx="694944" cy="694944"/>
+          </a:xfrm>
+          <a:prstGeom prst="ellipse">
+            <a:avLst/>
           </a:prstGeom>
           <a:solidFill>
             <a:srgbClr val="0070F2"/>
@@ -9092,14 +10345,84 @@
       </p:sp>
       <p:sp>
         <p:nvSpPr>
-          <p:cNvPr id="7" name="Text 5"/>
+          <p:cNvPr id="10" name="Text 8"/>
           <p:cNvSpPr txBox="1"/>
           <p:nvPr/>
         </p:nvSpPr>
         <p:spPr>
           <a:xfrm>
-            <a:off x="6885432" y="1819656"/>
-            <a:ext cx="4663440" cy="868680"/>
+            <a:off x="4336428" y="2308860"/>
+            <a:ext cx="694944" cy="694944"/>
+          </a:xfrm>
+          <a:prstGeom prst="rect">
+            <a:avLst/>
+          </a:prstGeom>
+          <a:noFill/>
+          <a:ln/>
+        </p:spPr>
+        <p:txBody>
+          <a:bodyPr wrap="square" lIns="0" tIns="0" rIns="0" bIns="0" rtlCol="0" anchor="ctr"/>
+          <a:lstStyle/>
+          <a:p>
+            <a:pPr algn="ctr" indent="0" marL="0">
+              <a:buNone/>
+            </a:pPr>
+            <a:r>
+              <a:rPr lang="en-US" sz="2280" b="1" dirty="0">
+                <a:solidFill>
+                  <a:srgbClr val="FFFFFF"/>
+                </a:solidFill>
+              </a:rPr>
+              <a:t>2</a:t>
+            </a:r>
+            <a:endParaRPr lang="en-US" sz="2280" dirty="0"/>
+          </a:p>
+        </p:txBody>
+      </p:sp>
+      <p:sp>
+        <p:nvSpPr>
+          <p:cNvPr id="11" name="Shape 9"/>
+          <p:cNvSpPr/>
+          <p:nvPr/>
+        </p:nvSpPr>
+        <p:spPr>
+          <a:xfrm>
+            <a:off x="3372536" y="3177540"/>
+            <a:ext cx="2622728" cy="1581912"/>
+          </a:xfrm>
+          <a:prstGeom prst="roundRect">
+            <a:avLst>
+              <a:gd name="adj" fmla="val 5780"/>
+            </a:avLst>
+          </a:prstGeom>
+          <a:solidFill>
+            <a:srgbClr val="FFFFFF"/>
+          </a:solidFill>
+          <a:ln w="9525">
+            <a:solidFill>
+              <a:srgbClr val="E5E5E5"/>
+            </a:solidFill>
+            <a:prstDash val="solid"/>
+          </a:ln>
+          <a:effectLst>
+            <a:outerShdw sx="100000" sy="100000" kx="0" ky="0" algn="bl" rotWithShape="0" blurRad="63500" dist="12700" dir="5400000">
+              <a:srgbClr val="1D2D3E">
+                <a:alpha val="8000"/>
+              </a:srgbClr>
+            </a:outerShdw>
+          </a:effectLst>
+        </p:spPr>
+      </p:sp>
+      <p:sp>
+        <p:nvSpPr>
+          <p:cNvPr id="12" name="Text 10"/>
+          <p:cNvSpPr txBox="1"/>
+          <p:nvPr/>
+        </p:nvSpPr>
+        <p:spPr>
+          <a:xfrm>
+            <a:off x="3555416" y="3360420"/>
+            <a:ext cx="1845488" cy="1261872"/>
           </a:xfrm>
           <a:prstGeom prst="rect">
             <a:avLst/>
@@ -9112,35 +10435,50 @@
           <a:lstStyle/>
           <a:p>
             <a:pPr indent="0" marL="0">
-              <a:buNone/>
-            </a:pPr>
-            <a:r>
-              <a:rPr lang="en-US" sz="1400" dirty="0">
-                <a:solidFill>
-                  <a:srgbClr val="FFFFFF"/>
-                </a:solidFill>
-              </a:rPr>
-              <a:t>Os três tiers foram aposentados; wrappers do Tier 2 seguem válidos</a:t>
+              <a:spcAft>
+                <a:spcPts val="600"/>
+              </a:spcAft>
+              <a:buNone/>
+            </a:pPr>
+            <a:r>
+              <a:rPr lang="en-US" sz="1350" b="1" dirty="0">
+                <a:solidFill>
+                  <a:srgbClr val="1D2D3E"/>
+                </a:solidFill>
+              </a:rPr>
+              <a:t>Adapt</a:t>
             </a:r>
             <a:endParaRPr lang="en-US" sz="1400" dirty="0"/>
           </a:p>
-        </p:txBody>
-      </p:sp>
-      <p:sp>
-        <p:nvSpPr>
-          <p:cNvPr id="8" name="Shape 6"/>
+          <a:p>
+            <a:pPr indent="0" marL="0">
+              <a:buNone/>
+            </a:pPr>
+            <a:r>
+              <a:rPr lang="en-US" sz="1150" dirty="0">
+                <a:solidFill>
+                  <a:srgbClr val="556B82"/>
+                </a:solidFill>
+              </a:rPr>
+              <a:t>Quick fixes no ADT e ajustes manuais onde não há automação.</a:t>
+            </a:r>
+            <a:endParaRPr lang="en-US" sz="1400" dirty="0"/>
+          </a:p>
+        </p:txBody>
+      </p:sp>
+      <p:sp>
+        <p:nvSpPr>
+          <p:cNvPr id="13" name="Shape 11"/>
           <p:cNvSpPr/>
           <p:nvPr/>
         </p:nvSpPr>
         <p:spPr>
           <a:xfrm>
-            <a:off x="731520" y="2834640"/>
-            <a:ext cx="438912" cy="438912"/>
-          </a:xfrm>
-          <a:prstGeom prst="roundRect">
-            <a:avLst>
-              <a:gd name="adj" fmla="val 20833"/>
-            </a:avLst>
+            <a:off x="7160324" y="2308860"/>
+            <a:ext cx="694944" cy="694944"/>
+          </a:xfrm>
+          <a:prstGeom prst="ellipse">
+            <a:avLst/>
           </a:prstGeom>
           <a:solidFill>
             <a:srgbClr val="0070F2"/>
@@ -9150,14 +10488,84 @@
       </p:sp>
       <p:sp>
         <p:nvSpPr>
-          <p:cNvPr id="9" name="Text 7"/>
+          <p:cNvPr id="14" name="Text 12"/>
           <p:cNvSpPr txBox="1"/>
           <p:nvPr/>
         </p:nvSpPr>
         <p:spPr>
           <a:xfrm>
-            <a:off x="1353312" y="2779776"/>
-            <a:ext cx="4663440" cy="868680"/>
+            <a:off x="7160324" y="2308860"/>
+            <a:ext cx="694944" cy="694944"/>
+          </a:xfrm>
+          <a:prstGeom prst="rect">
+            <a:avLst/>
+          </a:prstGeom>
+          <a:noFill/>
+          <a:ln/>
+        </p:spPr>
+        <p:txBody>
+          <a:bodyPr wrap="square" lIns="0" tIns="0" rIns="0" bIns="0" rtlCol="0" anchor="ctr"/>
+          <a:lstStyle/>
+          <a:p>
+            <a:pPr algn="ctr" indent="0" marL="0">
+              <a:buNone/>
+            </a:pPr>
+            <a:r>
+              <a:rPr lang="en-US" sz="2280" b="1" dirty="0">
+                <a:solidFill>
+                  <a:srgbClr val="FFFFFF"/>
+                </a:solidFill>
+              </a:rPr>
+              <a:t>3</a:t>
+            </a:r>
+            <a:endParaRPr lang="en-US" sz="2280" dirty="0"/>
+          </a:p>
+        </p:txBody>
+      </p:sp>
+      <p:sp>
+        <p:nvSpPr>
+          <p:cNvPr id="15" name="Shape 13"/>
+          <p:cNvSpPr/>
+          <p:nvPr/>
+        </p:nvSpPr>
+        <p:spPr>
+          <a:xfrm>
+            <a:off x="6196432" y="3177540"/>
+            <a:ext cx="2622728" cy="1581912"/>
+          </a:xfrm>
+          <a:prstGeom prst="roundRect">
+            <a:avLst>
+              <a:gd name="adj" fmla="val 5780"/>
+            </a:avLst>
+          </a:prstGeom>
+          <a:solidFill>
+            <a:srgbClr val="FFFFFF"/>
+          </a:solidFill>
+          <a:ln w="9525">
+            <a:solidFill>
+              <a:srgbClr val="E5E5E5"/>
+            </a:solidFill>
+            <a:prstDash val="solid"/>
+          </a:ln>
+          <a:effectLst>
+            <a:outerShdw sx="100000" sy="100000" kx="0" ky="0" algn="bl" rotWithShape="0" blurRad="63500" dist="12700" dir="5400000">
+              <a:srgbClr val="1D2D3E">
+                <a:alpha val="8000"/>
+              </a:srgbClr>
+            </a:outerShdw>
+          </a:effectLst>
+        </p:spPr>
+      </p:sp>
+      <p:sp>
+        <p:nvSpPr>
+          <p:cNvPr id="16" name="Text 14"/>
+          <p:cNvSpPr txBox="1"/>
+          <p:nvPr/>
+        </p:nvSpPr>
+        <p:spPr>
+          <a:xfrm>
+            <a:off x="6379312" y="3360420"/>
+            <a:ext cx="1845488" cy="1261872"/>
           </a:xfrm>
           <a:prstGeom prst="rect">
             <a:avLst/>
@@ -9170,43 +10578,50 @@
           <a:lstStyle/>
           <a:p>
             <a:pPr indent="0" marL="0">
-              <a:buNone/>
-            </a:pPr>
-            <a:r>
-              <a:rPr lang="en-US" sz="1400" b="1" dirty="0">
-                <a:solidFill>
-                  <a:srgbClr val="FFFFFF"/>
-                </a:solidFill>
-              </a:rPr>
-              <a:t>Níveis A–D</a:t>
-            </a:r>
-            <a:r>
-              <a:rPr lang="en-US" sz="1400" dirty="0">
-                <a:solidFill>
-                  <a:srgbClr val="FFFFFF"/>
-                </a:solidFill>
-              </a:rPr>
-              <a:t>: released, classic, internal e not recommended; vale o pior nível usado</a:t>
+              <a:spcAft>
+                <a:spcPts val="600"/>
+              </a:spcAft>
+              <a:buNone/>
+            </a:pPr>
+            <a:r>
+              <a:rPr lang="en-US" sz="1350" b="1" dirty="0">
+                <a:solidFill>
+                  <a:srgbClr val="1D2D3E"/>
+                </a:solidFill>
+              </a:rPr>
+              <a:t>Review</a:t>
             </a:r>
             <a:endParaRPr lang="en-US" sz="1400" dirty="0"/>
           </a:p>
-        </p:txBody>
-      </p:sp>
-      <p:sp>
-        <p:nvSpPr>
-          <p:cNvPr id="10" name="Shape 8"/>
+          <a:p>
+            <a:pPr indent="0" marL="0">
+              <a:buNone/>
+            </a:pPr>
+            <a:r>
+              <a:rPr lang="en-US" sz="1150" dirty="0">
+                <a:solidFill>
+                  <a:srgbClr val="556B82"/>
+                </a:solidFill>
+              </a:rPr>
+              <a:t>Modificações obsoletas, não usadas, irrelevantes ou substituíveis.</a:t>
+            </a:r>
+            <a:endParaRPr lang="en-US" sz="1400" dirty="0"/>
+          </a:p>
+        </p:txBody>
+      </p:sp>
+      <p:sp>
+        <p:nvSpPr>
+          <p:cNvPr id="17" name="Shape 15"/>
           <p:cNvSpPr/>
           <p:nvPr/>
         </p:nvSpPr>
         <p:spPr>
           <a:xfrm>
-            <a:off x="6263640" y="2834640"/>
-            <a:ext cx="438912" cy="438912"/>
-          </a:xfrm>
-          <a:prstGeom prst="roundRect">
-            <a:avLst>
-              <a:gd name="adj" fmla="val 20833"/>
-            </a:avLst>
+            <a:off x="9984219" y="2308860"/>
+            <a:ext cx="694944" cy="694944"/>
+          </a:xfrm>
+          <a:prstGeom prst="ellipse">
+            <a:avLst/>
           </a:prstGeom>
           <a:solidFill>
             <a:srgbClr val="0070F2"/>
@@ -9216,14 +10631,84 @@
       </p:sp>
       <p:sp>
         <p:nvSpPr>
-          <p:cNvPr id="11" name="Text 9"/>
+          <p:cNvPr id="18" name="Text 16"/>
           <p:cNvSpPr txBox="1"/>
           <p:nvPr/>
         </p:nvSpPr>
         <p:spPr>
           <a:xfrm>
-            <a:off x="6885432" y="2779776"/>
-            <a:ext cx="4663440" cy="868680"/>
+            <a:off x="9984219" y="2308860"/>
+            <a:ext cx="694944" cy="694944"/>
+          </a:xfrm>
+          <a:prstGeom prst="rect">
+            <a:avLst/>
+          </a:prstGeom>
+          <a:noFill/>
+          <a:ln/>
+        </p:spPr>
+        <p:txBody>
+          <a:bodyPr wrap="square" lIns="0" tIns="0" rIns="0" bIns="0" rtlCol="0" anchor="ctr"/>
+          <a:lstStyle/>
+          <a:p>
+            <a:pPr algn="ctr" indent="0" marL="0">
+              <a:buNone/>
+            </a:pPr>
+            <a:r>
+              <a:rPr lang="en-US" sz="2280" b="1" dirty="0">
+                <a:solidFill>
+                  <a:srgbClr val="FFFFFF"/>
+                </a:solidFill>
+              </a:rPr>
+              <a:t>4</a:t>
+            </a:r>
+            <a:endParaRPr lang="en-US" sz="2280" dirty="0"/>
+          </a:p>
+        </p:txBody>
+      </p:sp>
+      <p:sp>
+        <p:nvSpPr>
+          <p:cNvPr id="19" name="Shape 17"/>
+          <p:cNvSpPr/>
+          <p:nvPr/>
+        </p:nvSpPr>
+        <p:spPr>
+          <a:xfrm>
+            <a:off x="9020327" y="3177540"/>
+            <a:ext cx="2622728" cy="1581912"/>
+          </a:xfrm>
+          <a:prstGeom prst="roundRect">
+            <a:avLst>
+              <a:gd name="adj" fmla="val 5780"/>
+            </a:avLst>
+          </a:prstGeom>
+          <a:solidFill>
+            <a:srgbClr val="FFFFFF"/>
+          </a:solidFill>
+          <a:ln w="9525">
+            <a:solidFill>
+              <a:srgbClr val="E5E5E5"/>
+            </a:solidFill>
+            <a:prstDash val="solid"/>
+          </a:ln>
+          <a:effectLst>
+            <a:outerShdw sx="100000" sy="100000" kx="0" ky="0" algn="bl" rotWithShape="0" blurRad="63500" dist="12700" dir="5400000">
+              <a:srgbClr val="1D2D3E">
+                <a:alpha val="8000"/>
+              </a:srgbClr>
+            </a:outerShdw>
+          </a:effectLst>
+        </p:spPr>
+      </p:sp>
+      <p:sp>
+        <p:nvSpPr>
+          <p:cNvPr id="20" name="Text 18"/>
+          <p:cNvSpPr txBox="1"/>
+          <p:nvPr/>
+        </p:nvSpPr>
+        <p:spPr>
+          <a:xfrm>
+            <a:off x="9203207" y="3360420"/>
+            <a:ext cx="1845488" cy="1261872"/>
           </a:xfrm>
           <a:prstGeom prst="rect">
             <a:avLst/>
@@ -9236,225 +10721,69 @@
           <a:lstStyle/>
           <a:p>
             <a:pPr indent="0" marL="0">
-              <a:buNone/>
-            </a:pPr>
-            <a:r>
-              <a:rPr lang="en-US" sz="1400" dirty="0">
-                <a:solidFill>
-                  <a:srgbClr val="FFFFFF"/>
-                </a:solidFill>
-              </a:rPr>
-              <a:t>Software components, </a:t>
-            </a:r>
-            <a:r>
-              <a:rPr lang="en-US" sz="1400" dirty="0">
-                <a:solidFill>
-                  <a:srgbClr val="89D1FF"/>
-                </a:solidFill>
-                <a:latin typeface="Courier New" pitchFamily="34" charset="0"/>
-                <a:ea typeface="Courier New" pitchFamily="34" charset="-122"/>
-                <a:cs typeface="Courier New" pitchFamily="34" charset="-120"/>
-              </a:rPr>
-              <a:t>S_ABPLNGVS</a:t>
-            </a:r>
-            <a:r>
-              <a:rPr lang="en-US" sz="1400" dirty="0">
-                <a:solidFill>
-                  <a:srgbClr val="FFFFFF"/>
-                </a:solidFill>
-              </a:rPr>
-              <a:t> e versões de linguagem separam o código nível A</a:t>
+              <a:spcAft>
+                <a:spcPts val="600"/>
+              </a:spcAft>
+              <a:buNone/>
+            </a:pPr>
+            <a:r>
+              <a:rPr lang="en-US" sz="1350" b="1" dirty="0">
+                <a:solidFill>
+                  <a:srgbClr val="1D2D3E"/>
+                </a:solidFill>
+              </a:rPr>
+              <a:t>Optimize</a:t>
             </a:r>
             <a:endParaRPr lang="en-US" sz="1400" dirty="0"/>
           </a:p>
-        </p:txBody>
-      </p:sp>
-      <p:sp>
-        <p:nvSpPr>
-          <p:cNvPr id="12" name="Shape 10"/>
+          <a:p>
+            <a:pPr indent="0" marL="0">
+              <a:buNone/>
+            </a:pPr>
+            <a:r>
+              <a:rPr lang="en-US" sz="1150" dirty="0">
+                <a:solidFill>
+                  <a:srgbClr val="556B82"/>
+                </a:solidFill>
+              </a:rPr>
+              <a:t>SQL Monitor, SQL Trace e Performance Monitor no código mantido.</a:t>
+            </a:r>
+            <a:endParaRPr lang="en-US" sz="1400" dirty="0"/>
+          </a:p>
+        </p:txBody>
+      </p:sp>
+      <p:sp>
+        <p:nvSpPr>
+          <p:cNvPr id="21" name="Shape 19"/>
           <p:cNvSpPr/>
           <p:nvPr/>
         </p:nvSpPr>
         <p:spPr>
           <a:xfrm>
-            <a:off x="731520" y="3794760"/>
-            <a:ext cx="438912" cy="438912"/>
+            <a:off x="548640" y="4942332"/>
+            <a:ext cx="11094415" cy="566928"/>
           </a:xfrm>
           <a:prstGeom prst="roundRect">
             <a:avLst>
-              <a:gd name="adj" fmla="val 20833"/>
+              <a:gd name="adj" fmla="val 12903"/>
             </a:avLst>
           </a:prstGeom>
           <a:solidFill>
-            <a:srgbClr val="0070F2"/>
+            <a:srgbClr val="E1F4FF"/>
           </a:solidFill>
           <a:ln/>
         </p:spPr>
       </p:sp>
       <p:sp>
         <p:nvSpPr>
-          <p:cNvPr id="13" name="Text 11"/>
+          <p:cNvPr id="22" name="Text 20"/>
           <p:cNvSpPr txBox="1"/>
           <p:nvPr/>
         </p:nvSpPr>
         <p:spPr>
           <a:xfrm>
-            <a:off x="1353312" y="3739896"/>
-            <a:ext cx="4663440" cy="868680"/>
-          </a:xfrm>
-          <a:prstGeom prst="rect">
-            <a:avLst/>
-          </a:prstGeom>
-          <a:noFill/>
-          <a:ln/>
-        </p:spPr>
-        <p:txBody>
-          <a:bodyPr wrap="square" lIns="0" tIns="0" rIns="0" bIns="0" rtlCol="0" anchor="t"/>
-          <a:lstStyle/>
-          <a:p>
-            <a:pPr indent="0" marL="0">
-              <a:buNone/>
-            </a:pPr>
-            <a:r>
-              <a:rPr lang="en-US" sz="1400" dirty="0">
-                <a:solidFill>
-                  <a:srgbClr val="89D1FF"/>
-                </a:solidFill>
-                <a:latin typeface="Courier New" pitchFamily="34" charset="0"/>
-                <a:ea typeface="Courier New" pitchFamily="34" charset="-122"/>
-                <a:cs typeface="Courier New" pitchFamily="34" charset="-120"/>
-              </a:rPr>
-              <a:t>ABAP_CLOUD_DEVELOPMENT_DEFAULT</a:t>
-            </a:r>
-            <a:r>
-              <a:rPr lang="en-US" sz="1400" dirty="0">
-                <a:solidFill>
-                  <a:srgbClr val="FFFFFF"/>
-                </a:solidFill>
-              </a:rPr>
-              <a:t>, </a:t>
-            </a:r>
-            <a:r>
-              <a:rPr lang="en-US" sz="1400" dirty="0">
-                <a:solidFill>
-                  <a:srgbClr val="89D1FF"/>
-                </a:solidFill>
-                <a:latin typeface="Courier New" pitchFamily="34" charset="0"/>
-                <a:ea typeface="Courier New" pitchFamily="34" charset="-122"/>
-                <a:cs typeface="Courier New" pitchFamily="34" charset="-120"/>
-              </a:rPr>
-              <a:t>ABAP_CLOUD_READINESS</a:t>
-            </a:r>
-            <a:r>
-              <a:rPr lang="en-US" sz="1400" dirty="0">
-                <a:solidFill>
-                  <a:srgbClr val="FFFFFF"/>
-                </a:solidFill>
-              </a:rPr>
-              <a:t> e uma variante própria mostram o nível</a:t>
-            </a:r>
-            <a:endParaRPr lang="en-US" sz="1400" dirty="0"/>
-          </a:p>
-        </p:txBody>
-      </p:sp>
-      <p:sp>
-        <p:nvSpPr>
-          <p:cNvPr id="14" name="Shape 12"/>
-          <p:cNvSpPr/>
-          <p:nvPr/>
-        </p:nvSpPr>
-        <p:spPr>
-          <a:xfrm>
-            <a:off x="6263640" y="3794760"/>
-            <a:ext cx="438912" cy="438912"/>
-          </a:xfrm>
-          <a:prstGeom prst="roundRect">
-            <a:avLst>
-              <a:gd name="adj" fmla="val 20833"/>
-            </a:avLst>
-          </a:prstGeom>
-          <a:solidFill>
-            <a:srgbClr val="0070F2"/>
-          </a:solidFill>
-          <a:ln/>
-        </p:spPr>
-      </p:sp>
-      <p:sp>
-        <p:nvSpPr>
-          <p:cNvPr id="15" name="Text 13"/>
-          <p:cNvSpPr txBox="1"/>
-          <p:nvPr/>
-        </p:nvSpPr>
-        <p:spPr>
-          <a:xfrm>
-            <a:off x="6885432" y="3739896"/>
-            <a:ext cx="4663440" cy="868680"/>
-          </a:xfrm>
-          <a:prstGeom prst="rect">
-            <a:avLst/>
-          </a:prstGeom>
-          <a:noFill/>
-          <a:ln/>
-        </p:spPr>
-        <p:txBody>
-          <a:bodyPr wrap="square" lIns="0" tIns="0" rIns="0" bIns="0" rtlCol="0" anchor="t"/>
-          <a:lstStyle/>
-          <a:p>
-            <a:pPr indent="0" marL="0">
-              <a:buNone/>
-            </a:pPr>
-            <a:r>
-              <a:rPr lang="en-US" sz="1400" b="1" dirty="0">
-                <a:solidFill>
-                  <a:srgbClr val="FFFFFF"/>
-                </a:solidFill>
-              </a:rPr>
-              <a:t>Wrappers</a:t>
-            </a:r>
-            <a:r>
-              <a:rPr lang="en-US" sz="1400" dirty="0">
-                <a:solidFill>
-                  <a:srgbClr val="FFFFFF"/>
-                </a:solidFill>
-              </a:rPr>
-              <a:t> liberados com C1 levam APIs clássicas ao ABAP Cloud</a:t>
-            </a:r>
-            <a:endParaRPr lang="en-US" sz="1400" dirty="0"/>
-          </a:p>
-        </p:txBody>
-      </p:sp>
-      <p:sp>
-        <p:nvSpPr>
-          <p:cNvPr id="16" name="Shape 14"/>
-          <p:cNvSpPr/>
-          <p:nvPr/>
-        </p:nvSpPr>
-        <p:spPr>
-          <a:xfrm>
-            <a:off x="731520" y="5349240"/>
-            <a:ext cx="10698480" cy="749808"/>
-          </a:xfrm>
-          <a:prstGeom prst="roundRect">
-            <a:avLst>
-              <a:gd name="adj" fmla="val 12195"/>
-            </a:avLst>
-          </a:prstGeom>
-          <a:solidFill>
-            <a:srgbClr val="1B3A7A"/>
-          </a:solidFill>
-          <a:ln/>
-        </p:spPr>
-      </p:sp>
-      <p:sp>
-        <p:nvSpPr>
-          <p:cNvPr id="17" name="Text 15"/>
-          <p:cNvSpPr txBox="1"/>
-          <p:nvPr/>
-        </p:nvSpPr>
-        <p:spPr>
-          <a:xfrm>
-            <a:off x="1508760" y="5349240"/>
-            <a:ext cx="9692640" cy="749808"/>
+            <a:off x="1207008" y="4942332"/>
+            <a:ext cx="10225735" cy="566928"/>
           </a:xfrm>
           <a:prstGeom prst="rect">
             <a:avLst/>
@@ -9470,28 +10799,44 @@
               <a:buNone/>
             </a:pPr>
             <a:r>
-              <a:rPr lang="en-US" sz="1500" b="1" dirty="0">
-                <a:solidFill>
-                  <a:srgbClr val="89D1FF"/>
-                </a:solidFill>
-              </a:rPr>
-              <a:t>Fim do módulo  </a:t>
-            </a:r>
-            <a:r>
-              <a:rPr lang="en-US" sz="1500" dirty="0">
-                <a:solidFill>
-                  <a:srgbClr val="FFFFFF"/>
-                </a:solidFill>
-              </a:rPr>
-              <a:t>Revise a visão geral 05.00 e pratique os níveis A–D no seu próprio código.</a:t>
-            </a:r>
-            <a:endParaRPr lang="en-US" sz="1500" dirty="0"/>
+              <a:rPr lang="en-US" sz="1200" b="1" dirty="0">
+                <a:solidFill>
+                  <a:srgbClr val="0064D9"/>
+                </a:solidFill>
+              </a:rPr>
+              <a:t>Greenfield  </a:t>
+            </a:r>
+            <a:r>
+              <a:rPr lang="en-US" sz="1200" dirty="0">
+                <a:solidFill>
+                  <a:srgbClr val="1D2D3E"/>
+                </a:solidFill>
+              </a:rPr>
+              <a:t>uma nova implementação já nasce limpa; o trabalho é </a:t>
+            </a:r>
+            <a:r>
+              <a:rPr lang="en-US" sz="1200" b="1" dirty="0">
+                <a:solidFill>
+                  <a:srgbClr val="1D2D3E"/>
+                </a:solidFill>
+              </a:rPr>
+              <a:t>manter</a:t>
+            </a:r>
+            <a:r>
+              <a:rPr lang="en-US" sz="1200" dirty="0">
+                <a:solidFill>
+                  <a:srgbClr val="1D2D3E"/>
+                </a:solidFill>
+              </a:rPr>
+              <a:t> o núcleo limpo.</a:t>
+            </a:r>
+            <a:endParaRPr lang="en-US" sz="1400" dirty="0"/>
           </a:p>
         </p:txBody>
       </p:sp>
       <p:pic>
         <p:nvPicPr>
-          <p:cNvPr id="18" name="Image 0" descr="preencoded.png">    </p:cNvPr>
+          <p:cNvPr id="23" name="Image 0" descr="preencoded.png">    </p:cNvPr>
           <p:cNvPicPr>
             <a:picLocks noChangeAspect="1"/>
           </p:cNvPicPr>
@@ -9505,6 +10850,763 @@
         </p:blipFill>
         <p:spPr>
           <a:xfrm>
+            <a:off x="749808" y="5070348"/>
+            <a:ext cx="310896" cy="310896"/>
+          </a:xfrm>
+          <a:prstGeom prst="rect">
+            <a:avLst/>
+          </a:prstGeom>
+        </p:spPr>
+      </p:pic>
+      <p:pic>
+        <p:nvPicPr>
+          <p:cNvPr id="24" name="Image 1" descr="preencoded.png">    </p:cNvPr>
+          <p:cNvPicPr>
+            <a:picLocks noChangeAspect="1"/>
+          </p:cNvPicPr>
+          <p:nvPr/>
+        </p:nvPicPr>
+        <p:blipFill>
+          <a:blip r:embed="rId2"/>
+          <a:stretch>
+            <a:fillRect/>
+          </a:stretch>
+        </p:blipFill>
+        <p:spPr>
+          <a:xfrm>
+            <a:off x="8270519" y="3332988"/>
+            <a:ext cx="329184" cy="329184"/>
+          </a:xfrm>
+          <a:prstGeom prst="rect">
+            <a:avLst/>
+          </a:prstGeom>
+        </p:spPr>
+      </p:pic>
+      <p:pic>
+        <p:nvPicPr>
+          <p:cNvPr id="25" name="Image 2" descr="preencoded.png">    </p:cNvPr>
+          <p:cNvPicPr>
+            <a:picLocks noChangeAspect="1"/>
+          </p:cNvPicPr>
+          <p:nvPr/>
+        </p:nvPicPr>
+        <p:blipFill>
+          <a:blip r:embed="rId3"/>
+          <a:stretch>
+            <a:fillRect/>
+          </a:stretch>
+        </p:blipFill>
+        <p:spPr>
+          <a:xfrm>
+            <a:off x="2622728" y="3332988"/>
+            <a:ext cx="329184" cy="329184"/>
+          </a:xfrm>
+          <a:prstGeom prst="rect">
+            <a:avLst/>
+          </a:prstGeom>
+        </p:spPr>
+      </p:pic>
+      <p:pic>
+        <p:nvPicPr>
+          <p:cNvPr id="26" name="Image 3" descr="preencoded.png">    </p:cNvPr>
+          <p:cNvPicPr>
+            <a:picLocks noChangeAspect="1"/>
+          </p:cNvPicPr>
+          <p:nvPr/>
+        </p:nvPicPr>
+        <p:blipFill>
+          <a:blip r:embed="rId4"/>
+          <a:stretch>
+            <a:fillRect/>
+          </a:stretch>
+        </p:blipFill>
+        <p:spPr>
+          <a:xfrm>
+            <a:off x="5446624" y="3332988"/>
+            <a:ext cx="329184" cy="329184"/>
+          </a:xfrm>
+          <a:prstGeom prst="rect">
+            <a:avLst/>
+          </a:prstGeom>
+        </p:spPr>
+      </p:pic>
+      <p:pic>
+        <p:nvPicPr>
+          <p:cNvPr id="27" name="Image 4" descr="preencoded.png">    </p:cNvPr>
+          <p:cNvPicPr>
+            <a:picLocks noChangeAspect="1"/>
+          </p:cNvPicPr>
+          <p:nvPr/>
+        </p:nvPicPr>
+        <p:blipFill>
+          <a:blip r:embed="rId5"/>
+          <a:stretch>
+            <a:fillRect/>
+          </a:stretch>
+        </p:blipFill>
+        <p:spPr>
+          <a:xfrm>
+            <a:off x="11094415" y="3332988"/>
+            <a:ext cx="329184" cy="329184"/>
+          </a:xfrm>
+          <a:prstGeom prst="rect">
+            <a:avLst/>
+          </a:prstGeom>
+        </p:spPr>
+      </p:pic>
+      <p:sp>
+        <p:nvSpPr>
+          <p:cNvPr id="25" name="Slide Number Placeholder 0"/>
+          <p:cNvSpPr>
+            <a:spLocks noGrp="1"/>
+          </p:cNvSpPr>
+          <p:nvPr>
+            <p:ph type="sldNum" sz="quarter" idx="4294967295"/>
+          </p:nvPr>
+        </p:nvSpPr>
+        <p:spPr>
+          <a:xfrm>
+            <a:off x="11094415" y="6473952"/>
+            <a:ext cx="548640" cy="228600"/>
+          </a:xfrm>
+          <a:prstGeom prst="rect">
+            <a:avLst/>
+          </a:prstGeom>
+          <a:extLst>
+            <a:ext uri="{C572A759-6A51-4108-AA02-DFA0A04FC94B}">
+              <ma14:wrappingTextBoxFlag xmlns:ma14="http://schemas.microsoft.com/office/mac/drawingml/2011/main" val="0"/>
+            </a:ext>
+          </a:extLst>
+        </p:spPr>
+        <p:txBody>
+          <a:bodyPr lIns="0" tIns="0" rIns="0" bIns="0"/>
+          <a:lstStyle>
+            <a:lvl1pPr>
+              <a:defRPr sz="900">
+                <a:solidFill>
+                  <a:srgbClr val="556B82"/>
+                </a:solidFill>
+              </a:defRPr>
+            </a:lvl1pPr>
+          </a:lstStyle>
+          <a:p>
+            <a:pPr algn="r"/>
+            <a:fld id="{F7021451-1387-4CA6-816F-3879F97B5CBC}" type="slidenum">
+              <a:rPr b="0" lang="en-US"/>
+              <a:t>15</a:t>
+            </a:fld>
+            <a:endParaRPr lang="en-US"/>
+          </a:p>
+        </p:txBody>
+      </p:sp>
+    </p:spTree>
+  </p:cSld>
+  <p:clrMapOvr>
+    <a:masterClrMapping/>
+  </p:clrMapOvr>
+</p:sld>
+</file>
+
+<file path=ppt/slides/slide16.xml><?xml version="1.0" encoding="utf-8"?>
+<p:sld xmlns:a="http://schemas.openxmlformats.org/drawingml/2006/main" xmlns:r="http://schemas.openxmlformats.org/officeDocument/2006/relationships" xmlns:p="http://schemas.openxmlformats.org/presentationml/2006/main">
+  <p:cSld name="Slide 16">
+    <p:spTree>
+      <p:nvGrpSpPr>
+        <p:cNvPr id="1" name=""/>
+        <p:cNvGrpSpPr/>
+        <p:nvPr/>
+      </p:nvGrpSpPr>
+      <p:grpSpPr>
+        <a:xfrm>
+          <a:off x="0" y="0"/>
+          <a:ext cx="0" cy="0"/>
+          <a:chOff x="0" y="0"/>
+          <a:chExt cx="0" cy="0"/>
+        </a:xfrm>
+      </p:grpSpPr>
+      <p:sp>
+        <p:nvSpPr>
+          <p:cNvPr id="2" name="Text 0"/>
+          <p:cNvSpPr txBox="1"/>
+          <p:nvPr/>
+        </p:nvSpPr>
+        <p:spPr>
+          <a:xfrm>
+            <a:off x="731520" y="502920"/>
+            <a:ext cx="7315200" cy="320040"/>
+          </a:xfrm>
+          <a:prstGeom prst="rect">
+            <a:avLst/>
+          </a:prstGeom>
+          <a:noFill/>
+          <a:ln/>
+        </p:spPr>
+        <p:txBody>
+          <a:bodyPr wrap="square" lIns="0" tIns="0" rIns="0" bIns="0" rtlCol="0" anchor="t"/>
+          <a:lstStyle/>
+          <a:p>
+            <a:pPr indent="0" marL="0">
+              <a:buNone/>
+            </a:pPr>
+            <a:r>
+              <a:rPr lang="en-US" sz="1300" b="1" spc="200" kern="0" dirty="0">
+                <a:solidFill>
+                  <a:srgbClr val="89D1FF"/>
+                </a:solidFill>
+              </a:rPr>
+              <a:t>RESUMO DA AULA</a:t>
+            </a:r>
+            <a:endParaRPr lang="en-US" sz="1300" dirty="0"/>
+          </a:p>
+        </p:txBody>
+      </p:sp>
+      <p:sp>
+        <p:nvSpPr>
+          <p:cNvPr id="3" name="Text 1"/>
+          <p:cNvSpPr txBox="1"/>
+          <p:nvPr/>
+        </p:nvSpPr>
+        <p:spPr>
+          <a:xfrm>
+            <a:off x="731520" y="868680"/>
+            <a:ext cx="10698480" cy="731520"/>
+          </a:xfrm>
+          <a:prstGeom prst="rect">
+            <a:avLst/>
+          </a:prstGeom>
+          <a:noFill/>
+          <a:ln/>
+        </p:spPr>
+        <p:txBody>
+          <a:bodyPr wrap="square" lIns="0" tIns="0" rIns="0" bIns="0" rtlCol="0" anchor="ctr"/>
+          <a:lstStyle/>
+          <a:p>
+            <a:pPr indent="0" marL="0">
+              <a:buNone/>
+            </a:pPr>
+            <a:r>
+              <a:rPr lang="en-US" sz="3200" b="1" dirty="0">
+                <a:solidFill>
+                  <a:srgbClr val="FFFFFF"/>
+                </a:solidFill>
+              </a:rPr>
+              <a:t>O que aprendemos na aula 04.05</a:t>
+            </a:r>
+            <a:endParaRPr lang="en-US" sz="3200" dirty="0"/>
+          </a:p>
+        </p:txBody>
+      </p:sp>
+      <p:sp>
+        <p:nvSpPr>
+          <p:cNvPr id="4" name="Shape 2"/>
+          <p:cNvSpPr/>
+          <p:nvPr/>
+        </p:nvSpPr>
+        <p:spPr>
+          <a:xfrm>
+            <a:off x="731520" y="1874520"/>
+            <a:ext cx="438912" cy="438912"/>
+          </a:xfrm>
+          <a:prstGeom prst="roundRect">
+            <a:avLst>
+              <a:gd name="adj" fmla="val 20833"/>
+            </a:avLst>
+          </a:prstGeom>
+          <a:solidFill>
+            <a:srgbClr val="0070F2"/>
+          </a:solidFill>
+          <a:ln/>
+        </p:spPr>
+      </p:sp>
+      <p:sp>
+        <p:nvSpPr>
+          <p:cNvPr id="5" name="Text 3"/>
+          <p:cNvSpPr txBox="1"/>
+          <p:nvPr/>
+        </p:nvSpPr>
+        <p:spPr>
+          <a:xfrm>
+            <a:off x="1353312" y="1819656"/>
+            <a:ext cx="4663440" cy="868680"/>
+          </a:xfrm>
+          <a:prstGeom prst="rect">
+            <a:avLst/>
+          </a:prstGeom>
+          <a:noFill/>
+          <a:ln/>
+        </p:spPr>
+        <p:txBody>
+          <a:bodyPr wrap="square" lIns="0" tIns="0" rIns="0" bIns="0" rtlCol="0" anchor="t"/>
+          <a:lstStyle/>
+          <a:p>
+            <a:pPr indent="0" marL="0">
+              <a:buNone/>
+            </a:pPr>
+            <a:r>
+              <a:rPr lang="en-US" sz="1400" dirty="0">
+                <a:solidFill>
+                  <a:srgbClr val="FFFFFF"/>
+                </a:solidFill>
+              </a:rPr>
+              <a:t>No Private Edition e on-premise, ABAP Cloud </a:t>
+            </a:r>
+            <a:r>
+              <a:rPr lang="en-US" sz="1400" b="1" dirty="0">
+                <a:solidFill>
+                  <a:srgbClr val="FFFFFF"/>
+                </a:solidFill>
+              </a:rPr>
+              <a:t>coexiste</a:t>
+            </a:r>
+            <a:r>
+              <a:rPr lang="en-US" sz="1400" dirty="0">
+                <a:solidFill>
+                  <a:srgbClr val="FFFFFF"/>
+                </a:solidFill>
+              </a:rPr>
+              <a:t> com o clássico, mas continua o preferido</a:t>
+            </a:r>
+            <a:endParaRPr lang="en-US" sz="1400" dirty="0"/>
+          </a:p>
+        </p:txBody>
+      </p:sp>
+      <p:sp>
+        <p:nvSpPr>
+          <p:cNvPr id="6" name="Shape 4"/>
+          <p:cNvSpPr/>
+          <p:nvPr/>
+        </p:nvSpPr>
+        <p:spPr>
+          <a:xfrm>
+            <a:off x="6263640" y="1874520"/>
+            <a:ext cx="438912" cy="438912"/>
+          </a:xfrm>
+          <a:prstGeom prst="roundRect">
+            <a:avLst>
+              <a:gd name="adj" fmla="val 20833"/>
+            </a:avLst>
+          </a:prstGeom>
+          <a:solidFill>
+            <a:srgbClr val="0070F2"/>
+          </a:solidFill>
+          <a:ln/>
+        </p:spPr>
+      </p:sp>
+      <p:sp>
+        <p:nvSpPr>
+          <p:cNvPr id="7" name="Text 5"/>
+          <p:cNvSpPr txBox="1"/>
+          <p:nvPr/>
+        </p:nvSpPr>
+        <p:spPr>
+          <a:xfrm>
+            <a:off x="6885432" y="1819656"/>
+            <a:ext cx="4663440" cy="868680"/>
+          </a:xfrm>
+          <a:prstGeom prst="rect">
+            <a:avLst/>
+          </a:prstGeom>
+          <a:noFill/>
+          <a:ln/>
+        </p:spPr>
+        <p:txBody>
+          <a:bodyPr wrap="square" lIns="0" tIns="0" rIns="0" bIns="0" rtlCol="0" anchor="t"/>
+          <a:lstStyle/>
+          <a:p>
+            <a:pPr indent="0" marL="0">
+              <a:buNone/>
+            </a:pPr>
+            <a:r>
+              <a:rPr lang="en-US" sz="1400" dirty="0">
+                <a:solidFill>
+                  <a:srgbClr val="FFFFFF"/>
+                </a:solidFill>
+              </a:rPr>
+              <a:t>Os três tiers foram aposentados; wrappers do Tier 2 seguem válidos</a:t>
+            </a:r>
+            <a:endParaRPr lang="en-US" sz="1400" dirty="0"/>
+          </a:p>
+        </p:txBody>
+      </p:sp>
+      <p:sp>
+        <p:nvSpPr>
+          <p:cNvPr id="8" name="Shape 6"/>
+          <p:cNvSpPr/>
+          <p:nvPr/>
+        </p:nvSpPr>
+        <p:spPr>
+          <a:xfrm>
+            <a:off x="731520" y="2834640"/>
+            <a:ext cx="438912" cy="438912"/>
+          </a:xfrm>
+          <a:prstGeom prst="roundRect">
+            <a:avLst>
+              <a:gd name="adj" fmla="val 20833"/>
+            </a:avLst>
+          </a:prstGeom>
+          <a:solidFill>
+            <a:srgbClr val="0070F2"/>
+          </a:solidFill>
+          <a:ln/>
+        </p:spPr>
+      </p:sp>
+      <p:sp>
+        <p:nvSpPr>
+          <p:cNvPr id="9" name="Text 7"/>
+          <p:cNvSpPr txBox="1"/>
+          <p:nvPr/>
+        </p:nvSpPr>
+        <p:spPr>
+          <a:xfrm>
+            <a:off x="1353312" y="2779776"/>
+            <a:ext cx="4663440" cy="868680"/>
+          </a:xfrm>
+          <a:prstGeom prst="rect">
+            <a:avLst/>
+          </a:prstGeom>
+          <a:noFill/>
+          <a:ln/>
+        </p:spPr>
+        <p:txBody>
+          <a:bodyPr wrap="square" lIns="0" tIns="0" rIns="0" bIns="0" rtlCol="0" anchor="t"/>
+          <a:lstStyle/>
+          <a:p>
+            <a:pPr indent="0" marL="0">
+              <a:buNone/>
+            </a:pPr>
+            <a:r>
+              <a:rPr lang="en-US" sz="1400" b="1" dirty="0">
+                <a:solidFill>
+                  <a:srgbClr val="FFFFFF"/>
+                </a:solidFill>
+              </a:rPr>
+              <a:t>Níveis A–D</a:t>
+            </a:r>
+            <a:r>
+              <a:rPr lang="en-US" sz="1400" dirty="0">
+                <a:solidFill>
+                  <a:srgbClr val="FFFFFF"/>
+                </a:solidFill>
+              </a:rPr>
+              <a:t>: released, classic, internal e not recommended; vale o pior nível usado</a:t>
+            </a:r>
+            <a:endParaRPr lang="en-US" sz="1400" dirty="0"/>
+          </a:p>
+        </p:txBody>
+      </p:sp>
+      <p:sp>
+        <p:nvSpPr>
+          <p:cNvPr id="10" name="Shape 8"/>
+          <p:cNvSpPr/>
+          <p:nvPr/>
+        </p:nvSpPr>
+        <p:spPr>
+          <a:xfrm>
+            <a:off x="6263640" y="2834640"/>
+            <a:ext cx="438912" cy="438912"/>
+          </a:xfrm>
+          <a:prstGeom prst="roundRect">
+            <a:avLst>
+              <a:gd name="adj" fmla="val 20833"/>
+            </a:avLst>
+          </a:prstGeom>
+          <a:solidFill>
+            <a:srgbClr val="0070F2"/>
+          </a:solidFill>
+          <a:ln/>
+        </p:spPr>
+      </p:sp>
+      <p:sp>
+        <p:nvSpPr>
+          <p:cNvPr id="11" name="Text 9"/>
+          <p:cNvSpPr txBox="1"/>
+          <p:nvPr/>
+        </p:nvSpPr>
+        <p:spPr>
+          <a:xfrm>
+            <a:off x="6885432" y="2779776"/>
+            <a:ext cx="4663440" cy="868680"/>
+          </a:xfrm>
+          <a:prstGeom prst="rect">
+            <a:avLst/>
+          </a:prstGeom>
+          <a:noFill/>
+          <a:ln/>
+        </p:spPr>
+        <p:txBody>
+          <a:bodyPr wrap="square" lIns="0" tIns="0" rIns="0" bIns="0" rtlCol="0" anchor="t"/>
+          <a:lstStyle/>
+          <a:p>
+            <a:pPr indent="0" marL="0">
+              <a:buNone/>
+            </a:pPr>
+            <a:r>
+              <a:rPr lang="en-US" sz="1400" dirty="0">
+                <a:solidFill>
+                  <a:srgbClr val="FFFFFF"/>
+                </a:solidFill>
+              </a:rPr>
+              <a:t>Software components, </a:t>
+            </a:r>
+            <a:r>
+              <a:rPr lang="en-US" sz="1400" dirty="0">
+                <a:solidFill>
+                  <a:srgbClr val="89D1FF"/>
+                </a:solidFill>
+                <a:latin typeface="Courier New" pitchFamily="34" charset="0"/>
+                <a:ea typeface="Courier New" pitchFamily="34" charset="-122"/>
+                <a:cs typeface="Courier New" pitchFamily="34" charset="-120"/>
+              </a:rPr>
+              <a:t>S_ABPLNGVS</a:t>
+            </a:r>
+            <a:r>
+              <a:rPr lang="en-US" sz="1400" dirty="0">
+                <a:solidFill>
+                  <a:srgbClr val="FFFFFF"/>
+                </a:solidFill>
+              </a:rPr>
+              <a:t> e versões de linguagem separam o código nível A</a:t>
+            </a:r>
+            <a:endParaRPr lang="en-US" sz="1400" dirty="0"/>
+          </a:p>
+        </p:txBody>
+      </p:sp>
+      <p:sp>
+        <p:nvSpPr>
+          <p:cNvPr id="12" name="Shape 10"/>
+          <p:cNvSpPr/>
+          <p:nvPr/>
+        </p:nvSpPr>
+        <p:spPr>
+          <a:xfrm>
+            <a:off x="731520" y="3794760"/>
+            <a:ext cx="438912" cy="438912"/>
+          </a:xfrm>
+          <a:prstGeom prst="roundRect">
+            <a:avLst>
+              <a:gd name="adj" fmla="val 20833"/>
+            </a:avLst>
+          </a:prstGeom>
+          <a:solidFill>
+            <a:srgbClr val="0070F2"/>
+          </a:solidFill>
+          <a:ln/>
+        </p:spPr>
+      </p:sp>
+      <p:sp>
+        <p:nvSpPr>
+          <p:cNvPr id="13" name="Text 11"/>
+          <p:cNvSpPr txBox="1"/>
+          <p:nvPr/>
+        </p:nvSpPr>
+        <p:spPr>
+          <a:xfrm>
+            <a:off x="1353312" y="3739896"/>
+            <a:ext cx="4663440" cy="868680"/>
+          </a:xfrm>
+          <a:prstGeom prst="rect">
+            <a:avLst/>
+          </a:prstGeom>
+          <a:noFill/>
+          <a:ln/>
+        </p:spPr>
+        <p:txBody>
+          <a:bodyPr wrap="square" lIns="0" tIns="0" rIns="0" bIns="0" rtlCol="0" anchor="t"/>
+          <a:lstStyle/>
+          <a:p>
+            <a:pPr indent="0" marL="0">
+              <a:buNone/>
+            </a:pPr>
+            <a:r>
+              <a:rPr lang="en-US" sz="1400" dirty="0">
+                <a:solidFill>
+                  <a:srgbClr val="89D1FF"/>
+                </a:solidFill>
+                <a:latin typeface="Courier New" pitchFamily="34" charset="0"/>
+                <a:ea typeface="Courier New" pitchFamily="34" charset="-122"/>
+                <a:cs typeface="Courier New" pitchFamily="34" charset="-120"/>
+              </a:rPr>
+              <a:t>ABAP_CLOUD_DEVELOPMENT_DEFAULT</a:t>
+            </a:r>
+            <a:r>
+              <a:rPr lang="en-US" sz="1400" dirty="0">
+                <a:solidFill>
+                  <a:srgbClr val="FFFFFF"/>
+                </a:solidFill>
+              </a:rPr>
+              <a:t>, </a:t>
+            </a:r>
+            <a:r>
+              <a:rPr lang="en-US" sz="1400" dirty="0">
+                <a:solidFill>
+                  <a:srgbClr val="89D1FF"/>
+                </a:solidFill>
+                <a:latin typeface="Courier New" pitchFamily="34" charset="0"/>
+                <a:ea typeface="Courier New" pitchFamily="34" charset="-122"/>
+                <a:cs typeface="Courier New" pitchFamily="34" charset="-120"/>
+              </a:rPr>
+              <a:t>ABAP_CLOUD_READINESS</a:t>
+            </a:r>
+            <a:r>
+              <a:rPr lang="en-US" sz="1400" dirty="0">
+                <a:solidFill>
+                  <a:srgbClr val="FFFFFF"/>
+                </a:solidFill>
+              </a:rPr>
+              <a:t> e uma variante própria mostram o nível</a:t>
+            </a:r>
+            <a:endParaRPr lang="en-US" sz="1400" dirty="0"/>
+          </a:p>
+        </p:txBody>
+      </p:sp>
+      <p:sp>
+        <p:nvSpPr>
+          <p:cNvPr id="14" name="Shape 12"/>
+          <p:cNvSpPr/>
+          <p:nvPr/>
+        </p:nvSpPr>
+        <p:spPr>
+          <a:xfrm>
+            <a:off x="6263640" y="3794760"/>
+            <a:ext cx="438912" cy="438912"/>
+          </a:xfrm>
+          <a:prstGeom prst="roundRect">
+            <a:avLst>
+              <a:gd name="adj" fmla="val 20833"/>
+            </a:avLst>
+          </a:prstGeom>
+          <a:solidFill>
+            <a:srgbClr val="0070F2"/>
+          </a:solidFill>
+          <a:ln/>
+        </p:spPr>
+      </p:sp>
+      <p:sp>
+        <p:nvSpPr>
+          <p:cNvPr id="15" name="Text 13"/>
+          <p:cNvSpPr txBox="1"/>
+          <p:nvPr/>
+        </p:nvSpPr>
+        <p:spPr>
+          <a:xfrm>
+            <a:off x="6885432" y="3739896"/>
+            <a:ext cx="4663440" cy="868680"/>
+          </a:xfrm>
+          <a:prstGeom prst="rect">
+            <a:avLst/>
+          </a:prstGeom>
+          <a:noFill/>
+          <a:ln/>
+        </p:spPr>
+        <p:txBody>
+          <a:bodyPr wrap="square" lIns="0" tIns="0" rIns="0" bIns="0" rtlCol="0" anchor="t"/>
+          <a:lstStyle/>
+          <a:p>
+            <a:pPr indent="0" marL="0">
+              <a:buNone/>
+            </a:pPr>
+            <a:r>
+              <a:rPr lang="en-US" sz="1400" b="1" dirty="0">
+                <a:solidFill>
+                  <a:srgbClr val="FFFFFF"/>
+                </a:solidFill>
+              </a:rPr>
+              <a:t>Wrappers</a:t>
+            </a:r>
+            <a:r>
+              <a:rPr lang="en-US" sz="1400" dirty="0">
+                <a:solidFill>
+                  <a:srgbClr val="FFFFFF"/>
+                </a:solidFill>
+              </a:rPr>
+              <a:t> liberados com C1 levam APIs clássicas ao ABAP Cloud</a:t>
+            </a:r>
+            <a:endParaRPr lang="en-US" sz="1400" dirty="0"/>
+          </a:p>
+        </p:txBody>
+      </p:sp>
+      <p:sp>
+        <p:nvSpPr>
+          <p:cNvPr id="16" name="Shape 14"/>
+          <p:cNvSpPr/>
+          <p:nvPr/>
+        </p:nvSpPr>
+        <p:spPr>
+          <a:xfrm>
+            <a:off x="731520" y="5349240"/>
+            <a:ext cx="10698480" cy="749808"/>
+          </a:xfrm>
+          <a:prstGeom prst="roundRect">
+            <a:avLst>
+              <a:gd name="adj" fmla="val 12195"/>
+            </a:avLst>
+          </a:prstGeom>
+          <a:solidFill>
+            <a:srgbClr val="1B3A7A"/>
+          </a:solidFill>
+          <a:ln/>
+        </p:spPr>
+      </p:sp>
+      <p:sp>
+        <p:nvSpPr>
+          <p:cNvPr id="17" name="Text 15"/>
+          <p:cNvSpPr txBox="1"/>
+          <p:nvPr/>
+        </p:nvSpPr>
+        <p:spPr>
+          <a:xfrm>
+            <a:off x="1508760" y="5349240"/>
+            <a:ext cx="9692640" cy="749808"/>
+          </a:xfrm>
+          <a:prstGeom prst="rect">
+            <a:avLst/>
+          </a:prstGeom>
+          <a:noFill/>
+          <a:ln/>
+        </p:spPr>
+        <p:txBody>
+          <a:bodyPr wrap="square" lIns="0" tIns="0" rIns="0" bIns="0" rtlCol="0" anchor="ctr"/>
+          <a:lstStyle/>
+          <a:p>
+            <a:pPr indent="0" marL="0">
+              <a:buNone/>
+            </a:pPr>
+            <a:r>
+              <a:rPr lang="en-US" sz="1500" b="1" dirty="0">
+                <a:solidFill>
+                  <a:srgbClr val="89D1FF"/>
+                </a:solidFill>
+              </a:rPr>
+              <a:t>Fim da jornada  </a:t>
+            </a:r>
+            <a:r>
+              <a:rPr lang="en-US" sz="1500" dirty="0">
+                <a:solidFill>
+                  <a:srgbClr val="FFFFFF"/>
+                </a:solidFill>
+              </a:rPr>
+              <a:t>Revise a visão geral 04.00. Complemento: o módulo 05 leva o serviço RAP a um app SAP Fiori Elements.</a:t>
+            </a:r>
+            <a:endParaRPr lang="en-US" sz="1500" dirty="0"/>
+          </a:p>
+        </p:txBody>
+      </p:sp>
+      <p:pic>
+        <p:nvPicPr>
+          <p:cNvPr id="18" name="Image 0" descr="preencoded.png">    </p:cNvPr>
+          <p:cNvPicPr>
+            <a:picLocks noChangeAspect="1"/>
+          </p:cNvPicPr>
+          <p:nvPr/>
+        </p:nvPicPr>
+        <p:blipFill>
+          <a:blip r:embed="rId1"/>
+          <a:stretch>
+            <a:fillRect/>
+          </a:stretch>
+        </p:blipFill>
+        <p:spPr>
+          <a:xfrm>
             <a:off x="822960" y="1965960"/>
             <a:ext cx="256032" cy="256032"/>
           </a:xfrm>
@@ -9529,7 +11631,7 @@
         </p:blipFill>
         <p:spPr>
           <a:xfrm>
-            <a:off x="6355080" y="1965960"/>
+            <a:off x="822960" y="2926080"/>
             <a:ext cx="256032" cy="256032"/>
           </a:xfrm>
           <a:prstGeom prst="rect">
@@ -9553,7 +11655,7 @@
         </p:blipFill>
         <p:spPr>
           <a:xfrm>
-            <a:off x="6355080" y="2926080"/>
+            <a:off x="6355080" y="1965960"/>
             <a:ext cx="256032" cy="256032"/>
           </a:xfrm>
           <a:prstGeom prst="rect">
@@ -9577,7 +11679,7 @@
         </p:blipFill>
         <p:spPr>
           <a:xfrm>
-            <a:off x="822960" y="2926080"/>
+            <a:off x="6355080" y="2926080"/>
             <a:ext cx="256032" cy="256032"/>
           </a:xfrm>
           <a:prstGeom prst="rect">
@@ -9601,7 +11703,7 @@
         </p:blipFill>
         <p:spPr>
           <a:xfrm>
-            <a:off x="6355080" y="3886200"/>
+            <a:off x="822960" y="3886200"/>
             <a:ext cx="256032" cy="256032"/>
           </a:xfrm>
           <a:prstGeom prst="rect">
@@ -9625,7 +11727,7 @@
         </p:blipFill>
         <p:spPr>
           <a:xfrm>
-            <a:off x="822960" y="3886200"/>
+            <a:off x="6355080" y="3886200"/>
             <a:ext cx="256032" cy="256032"/>
           </a:xfrm>
           <a:prstGeom prst="rect">
@@ -9752,7 +11854,7 @@
                   <a:srgbClr val="1D2D3E"/>
                 </a:solidFill>
               </a:rPr>
-              <a:t>Módulo 05 em 5 aulas: Clean Core e extensibilidade</a:t>
+              <a:t>Módulo 04 em 5 aulas: Clean Core e extensibilidade</a:t>
             </a:r>
             <a:endParaRPr lang="en-US" sz="2800" dirty="0"/>
           </a:p>
@@ -10708,7 +12810,7 @@
         </p:blipFill>
         <p:spPr>
           <a:xfrm>
-            <a:off x="2072579" y="1847088"/>
+            <a:off x="6583497" y="1847088"/>
             <a:ext cx="347472" cy="347472"/>
           </a:xfrm>
           <a:prstGeom prst="rect">
@@ -10732,7 +12834,7 @@
         </p:blipFill>
         <p:spPr>
           <a:xfrm>
-            <a:off x="4328038" y="1847088"/>
+            <a:off x="8838956" y="1847088"/>
             <a:ext cx="347472" cy="347472"/>
           </a:xfrm>
           <a:prstGeom prst="rect">
@@ -10756,7 +12858,7 @@
         </p:blipFill>
         <p:spPr>
           <a:xfrm>
-            <a:off x="6583497" y="1847088"/>
+            <a:off x="2072579" y="1847088"/>
             <a:ext cx="347472" cy="347472"/>
           </a:xfrm>
           <a:prstGeom prst="rect">
@@ -10780,7 +12882,7 @@
         </p:blipFill>
         <p:spPr>
           <a:xfrm>
-            <a:off x="8838956" y="1847088"/>
+            <a:off x="11094415" y="1847088"/>
             <a:ext cx="347472" cy="347472"/>
           </a:xfrm>
           <a:prstGeom prst="rect">
@@ -10804,8 +12906,8 @@
         </p:blipFill>
         <p:spPr>
           <a:xfrm>
-            <a:off x="11094415" y="1847088"/>
-            <a:ext cx="347472" cy="347472"/>
+            <a:off x="749808" y="5751576"/>
+            <a:ext cx="310896" cy="310896"/>
           </a:xfrm>
           <a:prstGeom prst="rect">
             <a:avLst/>
@@ -10828,8 +12930,8 @@
         </p:blipFill>
         <p:spPr>
           <a:xfrm>
-            <a:off x="749808" y="5751576"/>
-            <a:ext cx="310896" cy="310896"/>
+            <a:off x="4328038" y="1847088"/>
+            <a:ext cx="347472" cy="347472"/>
           </a:xfrm>
           <a:prstGeom prst="rect">
             <a:avLst/>
@@ -11504,8 +13606,8 @@
         </p:blipFill>
         <p:spPr>
           <a:xfrm>
-            <a:off x="877824" y="2792063"/>
-            <a:ext cx="256032" cy="256032"/>
+            <a:off x="749808" y="4962049"/>
+            <a:ext cx="310896" cy="310896"/>
           </a:xfrm>
           <a:prstGeom prst="rect">
             <a:avLst/>
@@ -11528,8 +13630,8 @@
         </p:blipFill>
         <p:spPr>
           <a:xfrm>
-            <a:off x="749808" y="4962049"/>
-            <a:ext cx="310896" cy="310896"/>
+            <a:off x="877824" y="2792063"/>
+            <a:ext cx="256032" cy="256032"/>
           </a:xfrm>
           <a:prstGeom prst="rect">
             <a:avLst/>
@@ -11682,7 +13784,7 @@
                   <a:srgbClr val="89D1FF"/>
                 </a:solidFill>
               </a:rPr>
-              <a:t>AULA 05.05 · SEÇÃO 1</a:t>
+              <a:t>AULA 04.05 · SEÇÃO 1</a:t>
             </a:r>
             <a:endParaRPr lang="en-US" sz="1300" dirty="0"/>
           </a:p>
@@ -14411,7 +16513,7 @@
         </p:blipFill>
         <p:spPr>
           <a:xfrm>
-            <a:off x="4624730" y="3143631"/>
+            <a:off x="850392" y="3143631"/>
             <a:ext cx="256032" cy="256032"/>
           </a:xfrm>
           <a:prstGeom prst="rect">
@@ -14435,7 +16537,7 @@
         </p:blipFill>
         <p:spPr>
           <a:xfrm>
-            <a:off x="8399069" y="3143631"/>
+            <a:off x="4624730" y="3143631"/>
             <a:ext cx="256032" cy="256032"/>
           </a:xfrm>
           <a:prstGeom prst="rect">
@@ -14459,7 +16561,7 @@
         </p:blipFill>
         <p:spPr>
           <a:xfrm>
-            <a:off x="850392" y="3143631"/>
+            <a:off x="8399069" y="3143631"/>
             <a:ext cx="256032" cy="256032"/>
           </a:xfrm>
           <a:prstGeom prst="rect">
@@ -14589,7 +16691,7 @@
                   <a:srgbClr val="89D1FF"/>
                 </a:solidFill>
               </a:rPr>
-              <a:t>AULA 05.05 · SEÇÃO 2</a:t>
+              <a:t>AULA 04.05 · SEÇÃO 2</a:t>
             </a:r>
             <a:endParaRPr lang="en-US" sz="1300" dirty="0"/>
           </a:p>
